--- a/public/videos/repositories/tsumiage-log/tsumiage-log-tech-preview.pptx
+++ b/public/videos/repositories/tsumiage-log/tsumiage-log-tech-preview.pptx
@@ -134,7 +134,7 @@
           <p:cNvPr id="2" name="タイトル 1">
             <a:extLst>
               <a:ext uri="{FF2B5EF4-FFF2-40B4-BE49-F238E27FC236}">
-                <a16:creationId xmlns:a16="http://schemas.microsoft.com/office/drawing/2014/main" id="{A370A86D-D788-DAB6-1259-D5B236909353}"/>
+                <a16:creationId xmlns:a16="http://schemas.microsoft.com/office/drawing/2014/main" id="{59096898-76A2-DFE5-BB44-BCFB48F1E608}"/>
               </a:ext>
             </a:extLst>
           </p:cNvPr>
@@ -171,7 +171,7 @@
           <p:cNvPr id="3" name="字幕 2">
             <a:extLst>
               <a:ext uri="{FF2B5EF4-FFF2-40B4-BE49-F238E27FC236}">
-                <a16:creationId xmlns:a16="http://schemas.microsoft.com/office/drawing/2014/main" id="{CE6C91D0-12DD-95EE-69C3-FB9A623E5F5E}"/>
+                <a16:creationId xmlns:a16="http://schemas.microsoft.com/office/drawing/2014/main" id="{B2CD6A37-99D1-9DA7-4F77-738CD6536024}"/>
               </a:ext>
             </a:extLst>
           </p:cNvPr>
@@ -241,7 +241,7 @@
           <p:cNvPr id="4" name="日付プレースホルダー 3">
             <a:extLst>
               <a:ext uri="{FF2B5EF4-FFF2-40B4-BE49-F238E27FC236}">
-                <a16:creationId xmlns:a16="http://schemas.microsoft.com/office/drawing/2014/main" id="{516B0FBA-1938-6AAF-BB72-F52B6C4C5C3B}"/>
+                <a16:creationId xmlns:a16="http://schemas.microsoft.com/office/drawing/2014/main" id="{7C86134B-55E1-D901-83A3-455C7ECEF685}"/>
               </a:ext>
             </a:extLst>
           </p:cNvPr>
@@ -257,7 +257,7 @@
           <a:bodyPr/>
           <a:lstStyle/>
           <a:p>
-            <a:fld id="{5B888098-F48C-4F8D-B97D-A35C42FFD6DF}" type="datetimeFigureOut">
+            <a:fld id="{22A8C0A2-BA59-4CE8-827D-8EF6CB0A74B2}" type="datetimeFigureOut">
               <a:rPr kumimoji="1" lang="ja-JP" altLang="en-US" smtClean="0"/>
               <a:t>2026/7/30</a:t>
             </a:fld>
@@ -270,7 +270,7 @@
           <p:cNvPr id="5" name="フッター プレースホルダー 4">
             <a:extLst>
               <a:ext uri="{FF2B5EF4-FFF2-40B4-BE49-F238E27FC236}">
-                <a16:creationId xmlns:a16="http://schemas.microsoft.com/office/drawing/2014/main" id="{9C9AADC5-68F6-3D2C-FCB5-660D75635B1A}"/>
+                <a16:creationId xmlns:a16="http://schemas.microsoft.com/office/drawing/2014/main" id="{309ADDB3-F78E-442E-4150-59800E6EFDF3}"/>
               </a:ext>
             </a:extLst>
           </p:cNvPr>
@@ -295,7 +295,7 @@
           <p:cNvPr id="6" name="スライド番号プレースホルダー 5">
             <a:extLst>
               <a:ext uri="{FF2B5EF4-FFF2-40B4-BE49-F238E27FC236}">
-                <a16:creationId xmlns:a16="http://schemas.microsoft.com/office/drawing/2014/main" id="{C70C47B1-C99D-A765-8CE6-6B97AF5022A8}"/>
+                <a16:creationId xmlns:a16="http://schemas.microsoft.com/office/drawing/2014/main" id="{0BDCCF7B-3ED8-6A5D-B68A-CF1C8533F9C5}"/>
               </a:ext>
             </a:extLst>
           </p:cNvPr>
@@ -311,7 +311,7 @@
           <a:bodyPr/>
           <a:lstStyle/>
           <a:p>
-            <a:fld id="{2C7A2EAF-E281-4385-A315-A242EF19D0A8}" type="slidenum">
+            <a:fld id="{41ED1192-F97A-4203-869B-87C54365C7EB}" type="slidenum">
               <a:rPr kumimoji="1" lang="ja-JP" altLang="en-US" smtClean="0"/>
               <a:t>‹#›</a:t>
             </a:fld>
@@ -322,7 +322,7 @@
     </p:spTree>
     <p:extLst>
       <p:ext uri="{BB962C8B-B14F-4D97-AF65-F5344CB8AC3E}">
-        <p14:creationId xmlns:p14="http://schemas.microsoft.com/office/powerpoint/2010/main" val="507407566"/>
+        <p14:creationId xmlns:p14="http://schemas.microsoft.com/office/powerpoint/2010/main" val="2220169448"/>
       </p:ext>
     </p:extLst>
   </p:cSld>
@@ -354,7 +354,7 @@
           <p:cNvPr id="2" name="タイトル 1">
             <a:extLst>
               <a:ext uri="{FF2B5EF4-FFF2-40B4-BE49-F238E27FC236}">
-                <a16:creationId xmlns:a16="http://schemas.microsoft.com/office/drawing/2014/main" id="{2EC21ABA-917A-B253-C4B2-9A2D191870EC}"/>
+                <a16:creationId xmlns:a16="http://schemas.microsoft.com/office/drawing/2014/main" id="{9E8A6020-2649-4A7E-A04C-8E4076FFA223}"/>
               </a:ext>
             </a:extLst>
           </p:cNvPr>
@@ -382,7 +382,7 @@
           <p:cNvPr id="3" name="縦書きテキスト プレースホルダー 2">
             <a:extLst>
               <a:ext uri="{FF2B5EF4-FFF2-40B4-BE49-F238E27FC236}">
-                <a16:creationId xmlns:a16="http://schemas.microsoft.com/office/drawing/2014/main" id="{37599560-0BF5-CB21-5DC8-527ADEA1A66B}"/>
+                <a16:creationId xmlns:a16="http://schemas.microsoft.com/office/drawing/2014/main" id="{7DA678B0-3382-731F-DA9F-AEE57906D730}"/>
               </a:ext>
             </a:extLst>
           </p:cNvPr>
@@ -471,7 +471,7 @@
           <p:cNvPr id="4" name="日付プレースホルダー 3">
             <a:extLst>
               <a:ext uri="{FF2B5EF4-FFF2-40B4-BE49-F238E27FC236}">
-                <a16:creationId xmlns:a16="http://schemas.microsoft.com/office/drawing/2014/main" id="{E668F2A1-1298-E49F-986E-CC6B47165FE3}"/>
+                <a16:creationId xmlns:a16="http://schemas.microsoft.com/office/drawing/2014/main" id="{73F98A2F-CFCD-3479-D5E6-B5BFAE6DC0C4}"/>
               </a:ext>
             </a:extLst>
           </p:cNvPr>
@@ -487,7 +487,7 @@
           <a:bodyPr/>
           <a:lstStyle/>
           <a:p>
-            <a:fld id="{5B888098-F48C-4F8D-B97D-A35C42FFD6DF}" type="datetimeFigureOut">
+            <a:fld id="{22A8C0A2-BA59-4CE8-827D-8EF6CB0A74B2}" type="datetimeFigureOut">
               <a:rPr kumimoji="1" lang="ja-JP" altLang="en-US" smtClean="0"/>
               <a:t>2026/7/30</a:t>
             </a:fld>
@@ -500,7 +500,7 @@
           <p:cNvPr id="5" name="フッター プレースホルダー 4">
             <a:extLst>
               <a:ext uri="{FF2B5EF4-FFF2-40B4-BE49-F238E27FC236}">
-                <a16:creationId xmlns:a16="http://schemas.microsoft.com/office/drawing/2014/main" id="{6393F8F9-1432-DA5E-0B28-07E9A9E19516}"/>
+                <a16:creationId xmlns:a16="http://schemas.microsoft.com/office/drawing/2014/main" id="{1BFFCEC7-262A-A272-7164-D4FCA6845A39}"/>
               </a:ext>
             </a:extLst>
           </p:cNvPr>
@@ -525,7 +525,7 @@
           <p:cNvPr id="6" name="スライド番号プレースホルダー 5">
             <a:extLst>
               <a:ext uri="{FF2B5EF4-FFF2-40B4-BE49-F238E27FC236}">
-                <a16:creationId xmlns:a16="http://schemas.microsoft.com/office/drawing/2014/main" id="{2B1B4822-3E83-C175-005D-20CA162BD43C}"/>
+                <a16:creationId xmlns:a16="http://schemas.microsoft.com/office/drawing/2014/main" id="{B56F8A13-8D75-496C-7CDE-8649315A94E4}"/>
               </a:ext>
             </a:extLst>
           </p:cNvPr>
@@ -541,7 +541,7 @@
           <a:bodyPr/>
           <a:lstStyle/>
           <a:p>
-            <a:fld id="{2C7A2EAF-E281-4385-A315-A242EF19D0A8}" type="slidenum">
+            <a:fld id="{41ED1192-F97A-4203-869B-87C54365C7EB}" type="slidenum">
               <a:rPr kumimoji="1" lang="ja-JP" altLang="en-US" smtClean="0"/>
               <a:t>‹#›</a:t>
             </a:fld>
@@ -552,7 +552,7 @@
     </p:spTree>
     <p:extLst>
       <p:ext uri="{BB962C8B-B14F-4D97-AF65-F5344CB8AC3E}">
-        <p14:creationId xmlns:p14="http://schemas.microsoft.com/office/powerpoint/2010/main" val="2128047580"/>
+        <p14:creationId xmlns:p14="http://schemas.microsoft.com/office/powerpoint/2010/main" val="3383400150"/>
       </p:ext>
     </p:extLst>
   </p:cSld>
@@ -584,7 +584,7 @@
           <p:cNvPr id="2" name="縦書きタイトル 1">
             <a:extLst>
               <a:ext uri="{FF2B5EF4-FFF2-40B4-BE49-F238E27FC236}">
-                <a16:creationId xmlns:a16="http://schemas.microsoft.com/office/drawing/2014/main" id="{E98E6030-F6B8-89D3-E7A5-84C8B09AB28B}"/>
+                <a16:creationId xmlns:a16="http://schemas.microsoft.com/office/drawing/2014/main" id="{82FA556D-C8F6-18D9-025A-015FDB8F8B5E}"/>
               </a:ext>
             </a:extLst>
           </p:cNvPr>
@@ -617,7 +617,7 @@
           <p:cNvPr id="3" name="縦書きテキスト プレースホルダー 2">
             <a:extLst>
               <a:ext uri="{FF2B5EF4-FFF2-40B4-BE49-F238E27FC236}">
-                <a16:creationId xmlns:a16="http://schemas.microsoft.com/office/drawing/2014/main" id="{19ED006B-DFA8-F9FA-09DF-ED87E3D74D3D}"/>
+                <a16:creationId xmlns:a16="http://schemas.microsoft.com/office/drawing/2014/main" id="{9CFACE19-9983-88A2-54AB-1303846254F3}"/>
               </a:ext>
             </a:extLst>
           </p:cNvPr>
@@ -711,7 +711,7 @@
           <p:cNvPr id="4" name="日付プレースホルダー 3">
             <a:extLst>
               <a:ext uri="{FF2B5EF4-FFF2-40B4-BE49-F238E27FC236}">
-                <a16:creationId xmlns:a16="http://schemas.microsoft.com/office/drawing/2014/main" id="{11C976B1-403A-F9C9-B56C-AC09704CC31A}"/>
+                <a16:creationId xmlns:a16="http://schemas.microsoft.com/office/drawing/2014/main" id="{67CAC605-6FF0-990C-C4C6-F03D922F831A}"/>
               </a:ext>
             </a:extLst>
           </p:cNvPr>
@@ -727,7 +727,7 @@
           <a:bodyPr/>
           <a:lstStyle/>
           <a:p>
-            <a:fld id="{5B888098-F48C-4F8D-B97D-A35C42FFD6DF}" type="datetimeFigureOut">
+            <a:fld id="{22A8C0A2-BA59-4CE8-827D-8EF6CB0A74B2}" type="datetimeFigureOut">
               <a:rPr kumimoji="1" lang="ja-JP" altLang="en-US" smtClean="0"/>
               <a:t>2026/7/30</a:t>
             </a:fld>
@@ -740,7 +740,7 @@
           <p:cNvPr id="5" name="フッター プレースホルダー 4">
             <a:extLst>
               <a:ext uri="{FF2B5EF4-FFF2-40B4-BE49-F238E27FC236}">
-                <a16:creationId xmlns:a16="http://schemas.microsoft.com/office/drawing/2014/main" id="{C85EBCF8-AC52-1578-859F-0151C3E1D702}"/>
+                <a16:creationId xmlns:a16="http://schemas.microsoft.com/office/drawing/2014/main" id="{460A5B10-E19D-FC68-28E6-059F1E8F1445}"/>
               </a:ext>
             </a:extLst>
           </p:cNvPr>
@@ -765,7 +765,7 @@
           <p:cNvPr id="6" name="スライド番号プレースホルダー 5">
             <a:extLst>
               <a:ext uri="{FF2B5EF4-FFF2-40B4-BE49-F238E27FC236}">
-                <a16:creationId xmlns:a16="http://schemas.microsoft.com/office/drawing/2014/main" id="{74EA0F4C-EE3E-C8B6-639C-A201A967AE9D}"/>
+                <a16:creationId xmlns:a16="http://schemas.microsoft.com/office/drawing/2014/main" id="{11C3F9CF-69A0-5457-3459-656F70EC7AC3}"/>
               </a:ext>
             </a:extLst>
           </p:cNvPr>
@@ -781,7 +781,7 @@
           <a:bodyPr/>
           <a:lstStyle/>
           <a:p>
-            <a:fld id="{2C7A2EAF-E281-4385-A315-A242EF19D0A8}" type="slidenum">
+            <a:fld id="{41ED1192-F97A-4203-869B-87C54365C7EB}" type="slidenum">
               <a:rPr kumimoji="1" lang="ja-JP" altLang="en-US" smtClean="0"/>
               <a:t>‹#›</a:t>
             </a:fld>
@@ -792,7 +792,7 @@
     </p:spTree>
     <p:extLst>
       <p:ext uri="{BB962C8B-B14F-4D97-AF65-F5344CB8AC3E}">
-        <p14:creationId xmlns:p14="http://schemas.microsoft.com/office/powerpoint/2010/main" val="3949012729"/>
+        <p14:creationId xmlns:p14="http://schemas.microsoft.com/office/powerpoint/2010/main" val="292019430"/>
       </p:ext>
     </p:extLst>
   </p:cSld>
@@ -824,7 +824,7 @@
           <p:cNvPr id="2" name="タイトル 1">
             <a:extLst>
               <a:ext uri="{FF2B5EF4-FFF2-40B4-BE49-F238E27FC236}">
-                <a16:creationId xmlns:a16="http://schemas.microsoft.com/office/drawing/2014/main" id="{56EC3300-6E94-7CB6-DA14-75A8AE1EF865}"/>
+                <a16:creationId xmlns:a16="http://schemas.microsoft.com/office/drawing/2014/main" id="{96A05E73-F434-7EFC-D09B-7297007CEF98}"/>
               </a:ext>
             </a:extLst>
           </p:cNvPr>
@@ -852,7 +852,7 @@
           <p:cNvPr id="3" name="コンテンツ プレースホルダー 2">
             <a:extLst>
               <a:ext uri="{FF2B5EF4-FFF2-40B4-BE49-F238E27FC236}">
-                <a16:creationId xmlns:a16="http://schemas.microsoft.com/office/drawing/2014/main" id="{9C07AD79-2020-D4F6-E05A-D9CCC03BF9AF}"/>
+                <a16:creationId xmlns:a16="http://schemas.microsoft.com/office/drawing/2014/main" id="{92A82A81-B586-20BC-BDC7-F7FCF6CF6D07}"/>
               </a:ext>
             </a:extLst>
           </p:cNvPr>
@@ -941,7 +941,7 @@
           <p:cNvPr id="4" name="日付プレースホルダー 3">
             <a:extLst>
               <a:ext uri="{FF2B5EF4-FFF2-40B4-BE49-F238E27FC236}">
-                <a16:creationId xmlns:a16="http://schemas.microsoft.com/office/drawing/2014/main" id="{31875AC7-64EA-3C2E-8CAE-CF52C8E58F4C}"/>
+                <a16:creationId xmlns:a16="http://schemas.microsoft.com/office/drawing/2014/main" id="{9B33A0E1-581C-87A1-CB4F-B8A5A281656A}"/>
               </a:ext>
             </a:extLst>
           </p:cNvPr>
@@ -957,7 +957,7 @@
           <a:bodyPr/>
           <a:lstStyle/>
           <a:p>
-            <a:fld id="{5B888098-F48C-4F8D-B97D-A35C42FFD6DF}" type="datetimeFigureOut">
+            <a:fld id="{22A8C0A2-BA59-4CE8-827D-8EF6CB0A74B2}" type="datetimeFigureOut">
               <a:rPr kumimoji="1" lang="ja-JP" altLang="en-US" smtClean="0"/>
               <a:t>2026/7/30</a:t>
             </a:fld>
@@ -970,7 +970,7 @@
           <p:cNvPr id="5" name="フッター プレースホルダー 4">
             <a:extLst>
               <a:ext uri="{FF2B5EF4-FFF2-40B4-BE49-F238E27FC236}">
-                <a16:creationId xmlns:a16="http://schemas.microsoft.com/office/drawing/2014/main" id="{A335C259-79F7-17B6-179A-52E543C17C2D}"/>
+                <a16:creationId xmlns:a16="http://schemas.microsoft.com/office/drawing/2014/main" id="{47EE1C8F-AE12-287A-8B51-3F6EAF634307}"/>
               </a:ext>
             </a:extLst>
           </p:cNvPr>
@@ -995,7 +995,7 @@
           <p:cNvPr id="6" name="スライド番号プレースホルダー 5">
             <a:extLst>
               <a:ext uri="{FF2B5EF4-FFF2-40B4-BE49-F238E27FC236}">
-                <a16:creationId xmlns:a16="http://schemas.microsoft.com/office/drawing/2014/main" id="{960B51CA-57EC-B1E4-29D7-E423267DFA87}"/>
+                <a16:creationId xmlns:a16="http://schemas.microsoft.com/office/drawing/2014/main" id="{7EC0B255-0E8A-52F3-1C1F-4658097BCD4D}"/>
               </a:ext>
             </a:extLst>
           </p:cNvPr>
@@ -1011,7 +1011,7 @@
           <a:bodyPr/>
           <a:lstStyle/>
           <a:p>
-            <a:fld id="{2C7A2EAF-E281-4385-A315-A242EF19D0A8}" type="slidenum">
+            <a:fld id="{41ED1192-F97A-4203-869B-87C54365C7EB}" type="slidenum">
               <a:rPr kumimoji="1" lang="ja-JP" altLang="en-US" smtClean="0"/>
               <a:t>‹#›</a:t>
             </a:fld>
@@ -1022,7 +1022,7 @@
     </p:spTree>
     <p:extLst>
       <p:ext uri="{BB962C8B-B14F-4D97-AF65-F5344CB8AC3E}">
-        <p14:creationId xmlns:p14="http://schemas.microsoft.com/office/powerpoint/2010/main" val="2664372472"/>
+        <p14:creationId xmlns:p14="http://schemas.microsoft.com/office/powerpoint/2010/main" val="4151873276"/>
       </p:ext>
     </p:extLst>
   </p:cSld>
@@ -1054,7 +1054,7 @@
           <p:cNvPr id="2" name="タイトル 1">
             <a:extLst>
               <a:ext uri="{FF2B5EF4-FFF2-40B4-BE49-F238E27FC236}">
-                <a16:creationId xmlns:a16="http://schemas.microsoft.com/office/drawing/2014/main" id="{9D9925BD-45A8-5AB8-2DFF-619066F4A9F7}"/>
+                <a16:creationId xmlns:a16="http://schemas.microsoft.com/office/drawing/2014/main" id="{EEDA9A00-82C1-6401-86B1-3C0FCF9B108A}"/>
               </a:ext>
             </a:extLst>
           </p:cNvPr>
@@ -1091,7 +1091,7 @@
           <p:cNvPr id="3" name="テキスト プレースホルダー 2">
             <a:extLst>
               <a:ext uri="{FF2B5EF4-FFF2-40B4-BE49-F238E27FC236}">
-                <a16:creationId xmlns:a16="http://schemas.microsoft.com/office/drawing/2014/main" id="{25CCBB6A-F120-2F1E-9D30-A52A5B8328F7}"/>
+                <a16:creationId xmlns:a16="http://schemas.microsoft.com/office/drawing/2014/main" id="{5BB9D3B3-3180-2619-77F0-9559B42C89D8}"/>
               </a:ext>
             </a:extLst>
           </p:cNvPr>
@@ -1216,7 +1216,7 @@
           <p:cNvPr id="4" name="日付プレースホルダー 3">
             <a:extLst>
               <a:ext uri="{FF2B5EF4-FFF2-40B4-BE49-F238E27FC236}">
-                <a16:creationId xmlns:a16="http://schemas.microsoft.com/office/drawing/2014/main" id="{C324588D-8F3E-7E99-37A7-00FDBFF42E8E}"/>
+                <a16:creationId xmlns:a16="http://schemas.microsoft.com/office/drawing/2014/main" id="{1F5E1000-AFAB-FFC2-6AD8-8307CCED0E5F}"/>
               </a:ext>
             </a:extLst>
           </p:cNvPr>
@@ -1232,7 +1232,7 @@
           <a:bodyPr/>
           <a:lstStyle/>
           <a:p>
-            <a:fld id="{5B888098-F48C-4F8D-B97D-A35C42FFD6DF}" type="datetimeFigureOut">
+            <a:fld id="{22A8C0A2-BA59-4CE8-827D-8EF6CB0A74B2}" type="datetimeFigureOut">
               <a:rPr kumimoji="1" lang="ja-JP" altLang="en-US" smtClean="0"/>
               <a:t>2026/7/30</a:t>
             </a:fld>
@@ -1245,7 +1245,7 @@
           <p:cNvPr id="5" name="フッター プレースホルダー 4">
             <a:extLst>
               <a:ext uri="{FF2B5EF4-FFF2-40B4-BE49-F238E27FC236}">
-                <a16:creationId xmlns:a16="http://schemas.microsoft.com/office/drawing/2014/main" id="{C093366B-9CEF-18D6-04A6-7A2A0088A926}"/>
+                <a16:creationId xmlns:a16="http://schemas.microsoft.com/office/drawing/2014/main" id="{BB9ADF95-AB98-3514-AB80-CAB13ED148C9}"/>
               </a:ext>
             </a:extLst>
           </p:cNvPr>
@@ -1270,7 +1270,7 @@
           <p:cNvPr id="6" name="スライド番号プレースホルダー 5">
             <a:extLst>
               <a:ext uri="{FF2B5EF4-FFF2-40B4-BE49-F238E27FC236}">
-                <a16:creationId xmlns:a16="http://schemas.microsoft.com/office/drawing/2014/main" id="{62172405-5040-FD6A-3C9D-EEADDD2399E7}"/>
+                <a16:creationId xmlns:a16="http://schemas.microsoft.com/office/drawing/2014/main" id="{4B482197-9BB6-A85C-DB40-5588D76F3346}"/>
               </a:ext>
             </a:extLst>
           </p:cNvPr>
@@ -1286,7 +1286,7 @@
           <a:bodyPr/>
           <a:lstStyle/>
           <a:p>
-            <a:fld id="{2C7A2EAF-E281-4385-A315-A242EF19D0A8}" type="slidenum">
+            <a:fld id="{41ED1192-F97A-4203-869B-87C54365C7EB}" type="slidenum">
               <a:rPr kumimoji="1" lang="ja-JP" altLang="en-US" smtClean="0"/>
               <a:t>‹#›</a:t>
             </a:fld>
@@ -1297,7 +1297,7 @@
     </p:spTree>
     <p:extLst>
       <p:ext uri="{BB962C8B-B14F-4D97-AF65-F5344CB8AC3E}">
-        <p14:creationId xmlns:p14="http://schemas.microsoft.com/office/powerpoint/2010/main" val="1515137776"/>
+        <p14:creationId xmlns:p14="http://schemas.microsoft.com/office/powerpoint/2010/main" val="2540716486"/>
       </p:ext>
     </p:extLst>
   </p:cSld>
@@ -1329,7 +1329,7 @@
           <p:cNvPr id="2" name="タイトル 1">
             <a:extLst>
               <a:ext uri="{FF2B5EF4-FFF2-40B4-BE49-F238E27FC236}">
-                <a16:creationId xmlns:a16="http://schemas.microsoft.com/office/drawing/2014/main" id="{8EC7D8B9-050C-68E2-70B4-2EA163937B57}"/>
+                <a16:creationId xmlns:a16="http://schemas.microsoft.com/office/drawing/2014/main" id="{DDF2F4EF-0587-EB2F-CB7C-1ECF6C282676}"/>
               </a:ext>
             </a:extLst>
           </p:cNvPr>
@@ -1357,7 +1357,7 @@
           <p:cNvPr id="3" name="コンテンツ プレースホルダー 2">
             <a:extLst>
               <a:ext uri="{FF2B5EF4-FFF2-40B4-BE49-F238E27FC236}">
-                <a16:creationId xmlns:a16="http://schemas.microsoft.com/office/drawing/2014/main" id="{43503870-9ED6-4712-B643-F342DE15A4E4}"/>
+                <a16:creationId xmlns:a16="http://schemas.microsoft.com/office/drawing/2014/main" id="{9D22D957-B87D-484B-9E88-F005704F4459}"/>
               </a:ext>
             </a:extLst>
           </p:cNvPr>
@@ -1451,7 +1451,7 @@
           <p:cNvPr id="4" name="コンテンツ プレースホルダー 3">
             <a:extLst>
               <a:ext uri="{FF2B5EF4-FFF2-40B4-BE49-F238E27FC236}">
-                <a16:creationId xmlns:a16="http://schemas.microsoft.com/office/drawing/2014/main" id="{4B0634D0-3769-2E9C-CBE4-048C70A0C5A3}"/>
+                <a16:creationId xmlns:a16="http://schemas.microsoft.com/office/drawing/2014/main" id="{A6167B79-3487-5962-B361-3A45A2700943}"/>
               </a:ext>
             </a:extLst>
           </p:cNvPr>
@@ -1545,7 +1545,7 @@
           <p:cNvPr id="5" name="日付プレースホルダー 4">
             <a:extLst>
               <a:ext uri="{FF2B5EF4-FFF2-40B4-BE49-F238E27FC236}">
-                <a16:creationId xmlns:a16="http://schemas.microsoft.com/office/drawing/2014/main" id="{6A178D68-7ECD-BD2A-F22D-6134733272DE}"/>
+                <a16:creationId xmlns:a16="http://schemas.microsoft.com/office/drawing/2014/main" id="{5EB9210C-6326-F8B6-D7E5-804FCFD10D19}"/>
               </a:ext>
             </a:extLst>
           </p:cNvPr>
@@ -1561,7 +1561,7 @@
           <a:bodyPr/>
           <a:lstStyle/>
           <a:p>
-            <a:fld id="{5B888098-F48C-4F8D-B97D-A35C42FFD6DF}" type="datetimeFigureOut">
+            <a:fld id="{22A8C0A2-BA59-4CE8-827D-8EF6CB0A74B2}" type="datetimeFigureOut">
               <a:rPr kumimoji="1" lang="ja-JP" altLang="en-US" smtClean="0"/>
               <a:t>2026/7/30</a:t>
             </a:fld>
@@ -1574,7 +1574,7 @@
           <p:cNvPr id="6" name="フッター プレースホルダー 5">
             <a:extLst>
               <a:ext uri="{FF2B5EF4-FFF2-40B4-BE49-F238E27FC236}">
-                <a16:creationId xmlns:a16="http://schemas.microsoft.com/office/drawing/2014/main" id="{FDC3FA24-9C36-6A2D-DD0E-09BDAA92904A}"/>
+                <a16:creationId xmlns:a16="http://schemas.microsoft.com/office/drawing/2014/main" id="{F4ACCF16-2C2C-70C7-99DF-3345D70573C9}"/>
               </a:ext>
             </a:extLst>
           </p:cNvPr>
@@ -1599,7 +1599,7 @@
           <p:cNvPr id="7" name="スライド番号プレースホルダー 6">
             <a:extLst>
               <a:ext uri="{FF2B5EF4-FFF2-40B4-BE49-F238E27FC236}">
-                <a16:creationId xmlns:a16="http://schemas.microsoft.com/office/drawing/2014/main" id="{ED098B4F-4EA5-5406-9C76-E6290693EBC0}"/>
+                <a16:creationId xmlns:a16="http://schemas.microsoft.com/office/drawing/2014/main" id="{3A9B143E-0E9C-7905-934E-181B904D6194}"/>
               </a:ext>
             </a:extLst>
           </p:cNvPr>
@@ -1615,7 +1615,7 @@
           <a:bodyPr/>
           <a:lstStyle/>
           <a:p>
-            <a:fld id="{2C7A2EAF-E281-4385-A315-A242EF19D0A8}" type="slidenum">
+            <a:fld id="{41ED1192-F97A-4203-869B-87C54365C7EB}" type="slidenum">
               <a:rPr kumimoji="1" lang="ja-JP" altLang="en-US" smtClean="0"/>
               <a:t>‹#›</a:t>
             </a:fld>
@@ -1626,7 +1626,7 @@
     </p:spTree>
     <p:extLst>
       <p:ext uri="{BB962C8B-B14F-4D97-AF65-F5344CB8AC3E}">
-        <p14:creationId xmlns:p14="http://schemas.microsoft.com/office/powerpoint/2010/main" val="2459656988"/>
+        <p14:creationId xmlns:p14="http://schemas.microsoft.com/office/powerpoint/2010/main" val="326452946"/>
       </p:ext>
     </p:extLst>
   </p:cSld>
@@ -1658,7 +1658,7 @@
           <p:cNvPr id="2" name="タイトル 1">
             <a:extLst>
               <a:ext uri="{FF2B5EF4-FFF2-40B4-BE49-F238E27FC236}">
-                <a16:creationId xmlns:a16="http://schemas.microsoft.com/office/drawing/2014/main" id="{ABF7CA00-5096-BD7A-9182-56CBB18BE45E}"/>
+                <a16:creationId xmlns:a16="http://schemas.microsoft.com/office/drawing/2014/main" id="{AEDB700C-F713-6B0D-B023-AB0DAA113CA6}"/>
               </a:ext>
             </a:extLst>
           </p:cNvPr>
@@ -1691,7 +1691,7 @@
           <p:cNvPr id="3" name="テキスト プレースホルダー 2">
             <a:extLst>
               <a:ext uri="{FF2B5EF4-FFF2-40B4-BE49-F238E27FC236}">
-                <a16:creationId xmlns:a16="http://schemas.microsoft.com/office/drawing/2014/main" id="{FDDA295D-01DB-71DA-136D-6B4C46A3D19E}"/>
+                <a16:creationId xmlns:a16="http://schemas.microsoft.com/office/drawing/2014/main" id="{17658ADE-450C-56FE-6EA2-FAD5111F86D9}"/>
               </a:ext>
             </a:extLst>
           </p:cNvPr>
@@ -1762,7 +1762,7 @@
           <p:cNvPr id="4" name="コンテンツ プレースホルダー 3">
             <a:extLst>
               <a:ext uri="{FF2B5EF4-FFF2-40B4-BE49-F238E27FC236}">
-                <a16:creationId xmlns:a16="http://schemas.microsoft.com/office/drawing/2014/main" id="{241E3881-BDC3-5924-8FFB-AD780B7B0479}"/>
+                <a16:creationId xmlns:a16="http://schemas.microsoft.com/office/drawing/2014/main" id="{8B3B2E3F-7868-4B8F-5D1A-93E63CB26191}"/>
               </a:ext>
             </a:extLst>
           </p:cNvPr>
@@ -1856,7 +1856,7 @@
           <p:cNvPr id="5" name="テキスト プレースホルダー 4">
             <a:extLst>
               <a:ext uri="{FF2B5EF4-FFF2-40B4-BE49-F238E27FC236}">
-                <a16:creationId xmlns:a16="http://schemas.microsoft.com/office/drawing/2014/main" id="{E75ED9AB-DC4D-4A0D-DF40-7BF46406D854}"/>
+                <a16:creationId xmlns:a16="http://schemas.microsoft.com/office/drawing/2014/main" id="{9721A297-B66B-E00C-F03A-DD2211833D90}"/>
               </a:ext>
             </a:extLst>
           </p:cNvPr>
@@ -1927,7 +1927,7 @@
           <p:cNvPr id="6" name="コンテンツ プレースホルダー 5">
             <a:extLst>
               <a:ext uri="{FF2B5EF4-FFF2-40B4-BE49-F238E27FC236}">
-                <a16:creationId xmlns:a16="http://schemas.microsoft.com/office/drawing/2014/main" id="{F68E55AA-E102-16ED-D721-8FBB27B93A50}"/>
+                <a16:creationId xmlns:a16="http://schemas.microsoft.com/office/drawing/2014/main" id="{A5939D63-BBB9-DF77-AA89-32FADD8B8372}"/>
               </a:ext>
             </a:extLst>
           </p:cNvPr>
@@ -2021,7 +2021,7 @@
           <p:cNvPr id="7" name="日付プレースホルダー 6">
             <a:extLst>
               <a:ext uri="{FF2B5EF4-FFF2-40B4-BE49-F238E27FC236}">
-                <a16:creationId xmlns:a16="http://schemas.microsoft.com/office/drawing/2014/main" id="{948CD326-88EB-45E1-99FA-1290727B8835}"/>
+                <a16:creationId xmlns:a16="http://schemas.microsoft.com/office/drawing/2014/main" id="{58B5AFCC-7F03-C948-F7AB-F2A2C6072CB0}"/>
               </a:ext>
             </a:extLst>
           </p:cNvPr>
@@ -2037,7 +2037,7 @@
           <a:bodyPr/>
           <a:lstStyle/>
           <a:p>
-            <a:fld id="{5B888098-F48C-4F8D-B97D-A35C42FFD6DF}" type="datetimeFigureOut">
+            <a:fld id="{22A8C0A2-BA59-4CE8-827D-8EF6CB0A74B2}" type="datetimeFigureOut">
               <a:rPr kumimoji="1" lang="ja-JP" altLang="en-US" smtClean="0"/>
               <a:t>2026/7/30</a:t>
             </a:fld>
@@ -2050,7 +2050,7 @@
           <p:cNvPr id="8" name="フッター プレースホルダー 7">
             <a:extLst>
               <a:ext uri="{FF2B5EF4-FFF2-40B4-BE49-F238E27FC236}">
-                <a16:creationId xmlns:a16="http://schemas.microsoft.com/office/drawing/2014/main" id="{0C16E91F-D09D-C9F8-35D5-118A2B1A36F9}"/>
+                <a16:creationId xmlns:a16="http://schemas.microsoft.com/office/drawing/2014/main" id="{3774888D-C4AD-002B-2CCE-E293E1E55617}"/>
               </a:ext>
             </a:extLst>
           </p:cNvPr>
@@ -2075,7 +2075,7 @@
           <p:cNvPr id="9" name="スライド番号プレースホルダー 8">
             <a:extLst>
               <a:ext uri="{FF2B5EF4-FFF2-40B4-BE49-F238E27FC236}">
-                <a16:creationId xmlns:a16="http://schemas.microsoft.com/office/drawing/2014/main" id="{84DA0635-E949-06FF-F602-216FE58820FF}"/>
+                <a16:creationId xmlns:a16="http://schemas.microsoft.com/office/drawing/2014/main" id="{4AD12CD5-6DBB-8F70-9F39-5C160B795C22}"/>
               </a:ext>
             </a:extLst>
           </p:cNvPr>
@@ -2091,7 +2091,7 @@
           <a:bodyPr/>
           <a:lstStyle/>
           <a:p>
-            <a:fld id="{2C7A2EAF-E281-4385-A315-A242EF19D0A8}" type="slidenum">
+            <a:fld id="{41ED1192-F97A-4203-869B-87C54365C7EB}" type="slidenum">
               <a:rPr kumimoji="1" lang="ja-JP" altLang="en-US" smtClean="0"/>
               <a:t>‹#›</a:t>
             </a:fld>
@@ -2102,7 +2102,7 @@
     </p:spTree>
     <p:extLst>
       <p:ext uri="{BB962C8B-B14F-4D97-AF65-F5344CB8AC3E}">
-        <p14:creationId xmlns:p14="http://schemas.microsoft.com/office/powerpoint/2010/main" val="1339548468"/>
+        <p14:creationId xmlns:p14="http://schemas.microsoft.com/office/powerpoint/2010/main" val="3194933875"/>
       </p:ext>
     </p:extLst>
   </p:cSld>
@@ -2134,7 +2134,7 @@
           <p:cNvPr id="2" name="タイトル 1">
             <a:extLst>
               <a:ext uri="{FF2B5EF4-FFF2-40B4-BE49-F238E27FC236}">
-                <a16:creationId xmlns:a16="http://schemas.microsoft.com/office/drawing/2014/main" id="{96CB3C1C-6BEA-CF12-7A82-BA0078C0E45F}"/>
+                <a16:creationId xmlns:a16="http://schemas.microsoft.com/office/drawing/2014/main" id="{7ADEA043-6E44-CBF5-A628-4EA302E90955}"/>
               </a:ext>
             </a:extLst>
           </p:cNvPr>
@@ -2162,7 +2162,7 @@
           <p:cNvPr id="3" name="日付プレースホルダー 2">
             <a:extLst>
               <a:ext uri="{FF2B5EF4-FFF2-40B4-BE49-F238E27FC236}">
-                <a16:creationId xmlns:a16="http://schemas.microsoft.com/office/drawing/2014/main" id="{1374F6C9-9FF7-CF25-0525-93764D5B4315}"/>
+                <a16:creationId xmlns:a16="http://schemas.microsoft.com/office/drawing/2014/main" id="{714FBF01-5F39-6911-A109-6D76D0B76490}"/>
               </a:ext>
             </a:extLst>
           </p:cNvPr>
@@ -2178,7 +2178,7 @@
           <a:bodyPr/>
           <a:lstStyle/>
           <a:p>
-            <a:fld id="{5B888098-F48C-4F8D-B97D-A35C42FFD6DF}" type="datetimeFigureOut">
+            <a:fld id="{22A8C0A2-BA59-4CE8-827D-8EF6CB0A74B2}" type="datetimeFigureOut">
               <a:rPr kumimoji="1" lang="ja-JP" altLang="en-US" smtClean="0"/>
               <a:t>2026/7/30</a:t>
             </a:fld>
@@ -2191,7 +2191,7 @@
           <p:cNvPr id="4" name="フッター プレースホルダー 3">
             <a:extLst>
               <a:ext uri="{FF2B5EF4-FFF2-40B4-BE49-F238E27FC236}">
-                <a16:creationId xmlns:a16="http://schemas.microsoft.com/office/drawing/2014/main" id="{374457FF-B577-2492-18F6-D0D722564E1E}"/>
+                <a16:creationId xmlns:a16="http://schemas.microsoft.com/office/drawing/2014/main" id="{6C42C3AB-B256-07FA-B22A-248FA4F14C21}"/>
               </a:ext>
             </a:extLst>
           </p:cNvPr>
@@ -2216,7 +2216,7 @@
           <p:cNvPr id="5" name="スライド番号プレースホルダー 4">
             <a:extLst>
               <a:ext uri="{FF2B5EF4-FFF2-40B4-BE49-F238E27FC236}">
-                <a16:creationId xmlns:a16="http://schemas.microsoft.com/office/drawing/2014/main" id="{8133143F-1D78-431F-F4C4-46485B64A252}"/>
+                <a16:creationId xmlns:a16="http://schemas.microsoft.com/office/drawing/2014/main" id="{45C6B29B-A6A4-CC36-321A-B26FC6976323}"/>
               </a:ext>
             </a:extLst>
           </p:cNvPr>
@@ -2232,7 +2232,7 @@
           <a:bodyPr/>
           <a:lstStyle/>
           <a:p>
-            <a:fld id="{2C7A2EAF-E281-4385-A315-A242EF19D0A8}" type="slidenum">
+            <a:fld id="{41ED1192-F97A-4203-869B-87C54365C7EB}" type="slidenum">
               <a:rPr kumimoji="1" lang="ja-JP" altLang="en-US" smtClean="0"/>
               <a:t>‹#›</a:t>
             </a:fld>
@@ -2243,7 +2243,7 @@
     </p:spTree>
     <p:extLst>
       <p:ext uri="{BB962C8B-B14F-4D97-AF65-F5344CB8AC3E}">
-        <p14:creationId xmlns:p14="http://schemas.microsoft.com/office/powerpoint/2010/main" val="1901330275"/>
+        <p14:creationId xmlns:p14="http://schemas.microsoft.com/office/powerpoint/2010/main" val="3630237942"/>
       </p:ext>
     </p:extLst>
   </p:cSld>
@@ -2275,7 +2275,7 @@
           <p:cNvPr id="2" name="日付プレースホルダー 1">
             <a:extLst>
               <a:ext uri="{FF2B5EF4-FFF2-40B4-BE49-F238E27FC236}">
-                <a16:creationId xmlns:a16="http://schemas.microsoft.com/office/drawing/2014/main" id="{B4C7D919-4AF5-65DF-7412-566DFE60E3F3}"/>
+                <a16:creationId xmlns:a16="http://schemas.microsoft.com/office/drawing/2014/main" id="{68AC4C42-57DF-4BAE-0DF1-F2C2C458FA76}"/>
               </a:ext>
             </a:extLst>
           </p:cNvPr>
@@ -2291,7 +2291,7 @@
           <a:bodyPr/>
           <a:lstStyle/>
           <a:p>
-            <a:fld id="{5B888098-F48C-4F8D-B97D-A35C42FFD6DF}" type="datetimeFigureOut">
+            <a:fld id="{22A8C0A2-BA59-4CE8-827D-8EF6CB0A74B2}" type="datetimeFigureOut">
               <a:rPr kumimoji="1" lang="ja-JP" altLang="en-US" smtClean="0"/>
               <a:t>2026/7/30</a:t>
             </a:fld>
@@ -2304,7 +2304,7 @@
           <p:cNvPr id="3" name="フッター プレースホルダー 2">
             <a:extLst>
               <a:ext uri="{FF2B5EF4-FFF2-40B4-BE49-F238E27FC236}">
-                <a16:creationId xmlns:a16="http://schemas.microsoft.com/office/drawing/2014/main" id="{248988CA-74C1-1975-ECF8-E37C0D060915}"/>
+                <a16:creationId xmlns:a16="http://schemas.microsoft.com/office/drawing/2014/main" id="{D8FE030A-D24B-A985-6D8C-2EF8C9B70263}"/>
               </a:ext>
             </a:extLst>
           </p:cNvPr>
@@ -2329,7 +2329,7 @@
           <p:cNvPr id="4" name="スライド番号プレースホルダー 3">
             <a:extLst>
               <a:ext uri="{FF2B5EF4-FFF2-40B4-BE49-F238E27FC236}">
-                <a16:creationId xmlns:a16="http://schemas.microsoft.com/office/drawing/2014/main" id="{DC0BFE97-53A6-7ACA-8A7F-7239D7E81D8D}"/>
+                <a16:creationId xmlns:a16="http://schemas.microsoft.com/office/drawing/2014/main" id="{DC10DA9F-5F6C-795A-D3CF-0FC58ACE95B2}"/>
               </a:ext>
             </a:extLst>
           </p:cNvPr>
@@ -2345,7 +2345,7 @@
           <a:bodyPr/>
           <a:lstStyle/>
           <a:p>
-            <a:fld id="{2C7A2EAF-E281-4385-A315-A242EF19D0A8}" type="slidenum">
+            <a:fld id="{41ED1192-F97A-4203-869B-87C54365C7EB}" type="slidenum">
               <a:rPr kumimoji="1" lang="ja-JP" altLang="en-US" smtClean="0"/>
               <a:t>‹#›</a:t>
             </a:fld>
@@ -2356,7 +2356,7 @@
     </p:spTree>
     <p:extLst>
       <p:ext uri="{BB962C8B-B14F-4D97-AF65-F5344CB8AC3E}">
-        <p14:creationId xmlns:p14="http://schemas.microsoft.com/office/powerpoint/2010/main" val="377133411"/>
+        <p14:creationId xmlns:p14="http://schemas.microsoft.com/office/powerpoint/2010/main" val="1369577867"/>
       </p:ext>
     </p:extLst>
   </p:cSld>
@@ -2388,7 +2388,7 @@
           <p:cNvPr id="2" name="タイトル 1">
             <a:extLst>
               <a:ext uri="{FF2B5EF4-FFF2-40B4-BE49-F238E27FC236}">
-                <a16:creationId xmlns:a16="http://schemas.microsoft.com/office/drawing/2014/main" id="{F9E537C9-D686-207E-1F03-F84D809AF789}"/>
+                <a16:creationId xmlns:a16="http://schemas.microsoft.com/office/drawing/2014/main" id="{4B702F2D-CE86-EB0D-35DE-8D7D4D469547}"/>
               </a:ext>
             </a:extLst>
           </p:cNvPr>
@@ -2425,7 +2425,7 @@
           <p:cNvPr id="3" name="コンテンツ プレースホルダー 2">
             <a:extLst>
               <a:ext uri="{FF2B5EF4-FFF2-40B4-BE49-F238E27FC236}">
-                <a16:creationId xmlns:a16="http://schemas.microsoft.com/office/drawing/2014/main" id="{E540F67C-7A48-6156-A7ED-8A72C841D525}"/>
+                <a16:creationId xmlns:a16="http://schemas.microsoft.com/office/drawing/2014/main" id="{ECB2F989-61D8-532D-0B03-9379537FD55B}"/>
               </a:ext>
             </a:extLst>
           </p:cNvPr>
@@ -2547,7 +2547,7 @@
           <p:cNvPr id="4" name="テキスト プレースホルダー 3">
             <a:extLst>
               <a:ext uri="{FF2B5EF4-FFF2-40B4-BE49-F238E27FC236}">
-                <a16:creationId xmlns:a16="http://schemas.microsoft.com/office/drawing/2014/main" id="{63E5D82F-E8BA-AD3A-C500-D7B82D52A8F6}"/>
+                <a16:creationId xmlns:a16="http://schemas.microsoft.com/office/drawing/2014/main" id="{638936E9-ADB3-256A-F5F3-149F86111B7A}"/>
               </a:ext>
             </a:extLst>
           </p:cNvPr>
@@ -2618,7 +2618,7 @@
           <p:cNvPr id="5" name="日付プレースホルダー 4">
             <a:extLst>
               <a:ext uri="{FF2B5EF4-FFF2-40B4-BE49-F238E27FC236}">
-                <a16:creationId xmlns:a16="http://schemas.microsoft.com/office/drawing/2014/main" id="{32719177-9532-039D-02B0-1FFAF5E2E12F}"/>
+                <a16:creationId xmlns:a16="http://schemas.microsoft.com/office/drawing/2014/main" id="{93006881-2F7D-5B14-AFD5-2B7818E208C8}"/>
               </a:ext>
             </a:extLst>
           </p:cNvPr>
@@ -2634,7 +2634,7 @@
           <a:bodyPr/>
           <a:lstStyle/>
           <a:p>
-            <a:fld id="{5B888098-F48C-4F8D-B97D-A35C42FFD6DF}" type="datetimeFigureOut">
+            <a:fld id="{22A8C0A2-BA59-4CE8-827D-8EF6CB0A74B2}" type="datetimeFigureOut">
               <a:rPr kumimoji="1" lang="ja-JP" altLang="en-US" smtClean="0"/>
               <a:t>2026/7/30</a:t>
             </a:fld>
@@ -2647,7 +2647,7 @@
           <p:cNvPr id="6" name="フッター プレースホルダー 5">
             <a:extLst>
               <a:ext uri="{FF2B5EF4-FFF2-40B4-BE49-F238E27FC236}">
-                <a16:creationId xmlns:a16="http://schemas.microsoft.com/office/drawing/2014/main" id="{25B24FB9-D53A-EE17-A21E-C7B408A1418A}"/>
+                <a16:creationId xmlns:a16="http://schemas.microsoft.com/office/drawing/2014/main" id="{8355E132-699E-A148-7FDC-3187BDB92034}"/>
               </a:ext>
             </a:extLst>
           </p:cNvPr>
@@ -2672,7 +2672,7 @@
           <p:cNvPr id="7" name="スライド番号プレースホルダー 6">
             <a:extLst>
               <a:ext uri="{FF2B5EF4-FFF2-40B4-BE49-F238E27FC236}">
-                <a16:creationId xmlns:a16="http://schemas.microsoft.com/office/drawing/2014/main" id="{B1190B2F-5F3F-A6D0-145E-00154B4DE961}"/>
+                <a16:creationId xmlns:a16="http://schemas.microsoft.com/office/drawing/2014/main" id="{A0A52C92-8011-0579-4224-A5216FF64299}"/>
               </a:ext>
             </a:extLst>
           </p:cNvPr>
@@ -2688,7 +2688,7 @@
           <a:bodyPr/>
           <a:lstStyle/>
           <a:p>
-            <a:fld id="{2C7A2EAF-E281-4385-A315-A242EF19D0A8}" type="slidenum">
+            <a:fld id="{41ED1192-F97A-4203-869B-87C54365C7EB}" type="slidenum">
               <a:rPr kumimoji="1" lang="ja-JP" altLang="en-US" smtClean="0"/>
               <a:t>‹#›</a:t>
             </a:fld>
@@ -2699,7 +2699,7 @@
     </p:spTree>
     <p:extLst>
       <p:ext uri="{BB962C8B-B14F-4D97-AF65-F5344CB8AC3E}">
-        <p14:creationId xmlns:p14="http://schemas.microsoft.com/office/powerpoint/2010/main" val="2396486145"/>
+        <p14:creationId xmlns:p14="http://schemas.microsoft.com/office/powerpoint/2010/main" val="3257505796"/>
       </p:ext>
     </p:extLst>
   </p:cSld>
@@ -2731,7 +2731,7 @@
           <p:cNvPr id="2" name="タイトル 1">
             <a:extLst>
               <a:ext uri="{FF2B5EF4-FFF2-40B4-BE49-F238E27FC236}">
-                <a16:creationId xmlns:a16="http://schemas.microsoft.com/office/drawing/2014/main" id="{8FE3D5BD-9F32-CAB6-E76A-4F56F3BA4C75}"/>
+                <a16:creationId xmlns:a16="http://schemas.microsoft.com/office/drawing/2014/main" id="{E6DF2ACD-CE3D-6A8D-4244-39780564CCE6}"/>
               </a:ext>
             </a:extLst>
           </p:cNvPr>
@@ -2768,7 +2768,7 @@
           <p:cNvPr id="3" name="図プレースホルダー 2">
             <a:extLst>
               <a:ext uri="{FF2B5EF4-FFF2-40B4-BE49-F238E27FC236}">
-                <a16:creationId xmlns:a16="http://schemas.microsoft.com/office/drawing/2014/main" id="{0C82DFDF-69EF-82E6-AA55-2CCF62D91044}"/>
+                <a16:creationId xmlns:a16="http://schemas.microsoft.com/office/drawing/2014/main" id="{B91BC629-0804-0A55-BE36-9EA0DF94C183}"/>
               </a:ext>
             </a:extLst>
           </p:cNvPr>
@@ -2835,7 +2835,7 @@
           <p:cNvPr id="4" name="テキスト プレースホルダー 3">
             <a:extLst>
               <a:ext uri="{FF2B5EF4-FFF2-40B4-BE49-F238E27FC236}">
-                <a16:creationId xmlns:a16="http://schemas.microsoft.com/office/drawing/2014/main" id="{AB451931-A106-C0F5-0953-80480CB87CA8}"/>
+                <a16:creationId xmlns:a16="http://schemas.microsoft.com/office/drawing/2014/main" id="{C448EB52-3F07-F57A-30FC-B3FD080932F9}"/>
               </a:ext>
             </a:extLst>
           </p:cNvPr>
@@ -2906,7 +2906,7 @@
           <p:cNvPr id="5" name="日付プレースホルダー 4">
             <a:extLst>
               <a:ext uri="{FF2B5EF4-FFF2-40B4-BE49-F238E27FC236}">
-                <a16:creationId xmlns:a16="http://schemas.microsoft.com/office/drawing/2014/main" id="{F89C5CDE-61AC-58C3-1FAB-F377EA462B1B}"/>
+                <a16:creationId xmlns:a16="http://schemas.microsoft.com/office/drawing/2014/main" id="{B12CCD82-1A53-61E7-36CF-61A44569ED47}"/>
               </a:ext>
             </a:extLst>
           </p:cNvPr>
@@ -2922,7 +2922,7 @@
           <a:bodyPr/>
           <a:lstStyle/>
           <a:p>
-            <a:fld id="{5B888098-F48C-4F8D-B97D-A35C42FFD6DF}" type="datetimeFigureOut">
+            <a:fld id="{22A8C0A2-BA59-4CE8-827D-8EF6CB0A74B2}" type="datetimeFigureOut">
               <a:rPr kumimoji="1" lang="ja-JP" altLang="en-US" smtClean="0"/>
               <a:t>2026/7/30</a:t>
             </a:fld>
@@ -2935,7 +2935,7 @@
           <p:cNvPr id="6" name="フッター プレースホルダー 5">
             <a:extLst>
               <a:ext uri="{FF2B5EF4-FFF2-40B4-BE49-F238E27FC236}">
-                <a16:creationId xmlns:a16="http://schemas.microsoft.com/office/drawing/2014/main" id="{58DEBD8A-947F-CF13-C06A-821AE74982F1}"/>
+                <a16:creationId xmlns:a16="http://schemas.microsoft.com/office/drawing/2014/main" id="{34257B7A-DE50-2813-06B9-9EFDFBE1F466}"/>
               </a:ext>
             </a:extLst>
           </p:cNvPr>
@@ -2960,7 +2960,7 @@
           <p:cNvPr id="7" name="スライド番号プレースホルダー 6">
             <a:extLst>
               <a:ext uri="{FF2B5EF4-FFF2-40B4-BE49-F238E27FC236}">
-                <a16:creationId xmlns:a16="http://schemas.microsoft.com/office/drawing/2014/main" id="{A72BD3C6-D46F-3909-2F77-6854753CE6C3}"/>
+                <a16:creationId xmlns:a16="http://schemas.microsoft.com/office/drawing/2014/main" id="{DB25C5D4-5B62-60BE-1237-5DC151FE079D}"/>
               </a:ext>
             </a:extLst>
           </p:cNvPr>
@@ -2976,7 +2976,7 @@
           <a:bodyPr/>
           <a:lstStyle/>
           <a:p>
-            <a:fld id="{2C7A2EAF-E281-4385-A315-A242EF19D0A8}" type="slidenum">
+            <a:fld id="{41ED1192-F97A-4203-869B-87C54365C7EB}" type="slidenum">
               <a:rPr kumimoji="1" lang="ja-JP" altLang="en-US" smtClean="0"/>
               <a:t>‹#›</a:t>
             </a:fld>
@@ -2987,7 +2987,7 @@
     </p:spTree>
     <p:extLst>
       <p:ext uri="{BB962C8B-B14F-4D97-AF65-F5344CB8AC3E}">
-        <p14:creationId xmlns:p14="http://schemas.microsoft.com/office/powerpoint/2010/main" val="1623865722"/>
+        <p14:creationId xmlns:p14="http://schemas.microsoft.com/office/powerpoint/2010/main" val="330822912"/>
       </p:ext>
     </p:extLst>
   </p:cSld>
@@ -3024,7 +3024,7 @@
           <p:cNvPr id="2" name="タイトル プレースホルダー 1">
             <a:extLst>
               <a:ext uri="{FF2B5EF4-FFF2-40B4-BE49-F238E27FC236}">
-                <a16:creationId xmlns:a16="http://schemas.microsoft.com/office/drawing/2014/main" id="{E73E1561-5C47-AA47-9992-AAC11EC08998}"/>
+                <a16:creationId xmlns:a16="http://schemas.microsoft.com/office/drawing/2014/main" id="{E4668464-BE4E-1174-E6E7-D6F21DC80F05}"/>
               </a:ext>
             </a:extLst>
           </p:cNvPr>
@@ -3062,7 +3062,7 @@
           <p:cNvPr id="3" name="テキスト プレースホルダー 2">
             <a:extLst>
               <a:ext uri="{FF2B5EF4-FFF2-40B4-BE49-F238E27FC236}">
-                <a16:creationId xmlns:a16="http://schemas.microsoft.com/office/drawing/2014/main" id="{E747D42E-6331-93DE-1EA6-0233D6DF618F}"/>
+                <a16:creationId xmlns:a16="http://schemas.microsoft.com/office/drawing/2014/main" id="{7171CBE6-902F-E9D9-D524-20B5D6A6D648}"/>
               </a:ext>
             </a:extLst>
           </p:cNvPr>
@@ -3161,7 +3161,7 @@
           <p:cNvPr id="4" name="日付プレースホルダー 3">
             <a:extLst>
               <a:ext uri="{FF2B5EF4-FFF2-40B4-BE49-F238E27FC236}">
-                <a16:creationId xmlns:a16="http://schemas.microsoft.com/office/drawing/2014/main" id="{AC4D1E0D-FAA4-ABEB-E70B-2E4B9AB4AA39}"/>
+                <a16:creationId xmlns:a16="http://schemas.microsoft.com/office/drawing/2014/main" id="{99D06986-1397-4DBD-36B5-EAB35BA5DE1A}"/>
               </a:ext>
             </a:extLst>
           </p:cNvPr>
@@ -3195,7 +3195,7 @@
             </a:lvl1pPr>
           </a:lstStyle>
           <a:p>
-            <a:fld id="{5B888098-F48C-4F8D-B97D-A35C42FFD6DF}" type="datetimeFigureOut">
+            <a:fld id="{22A8C0A2-BA59-4CE8-827D-8EF6CB0A74B2}" type="datetimeFigureOut">
               <a:rPr kumimoji="1" lang="ja-JP" altLang="en-US" smtClean="0"/>
               <a:t>2026/7/30</a:t>
             </a:fld>
@@ -3208,7 +3208,7 @@
           <p:cNvPr id="5" name="フッター プレースホルダー 4">
             <a:extLst>
               <a:ext uri="{FF2B5EF4-FFF2-40B4-BE49-F238E27FC236}">
-                <a16:creationId xmlns:a16="http://schemas.microsoft.com/office/drawing/2014/main" id="{EA00EA72-D82D-9332-FD9C-ACBFA94AEB1F}"/>
+                <a16:creationId xmlns:a16="http://schemas.microsoft.com/office/drawing/2014/main" id="{283D139B-A116-68A3-138B-DACB4D90DA5A}"/>
               </a:ext>
             </a:extLst>
           </p:cNvPr>
@@ -3251,7 +3251,7 @@
           <p:cNvPr id="6" name="スライド番号プレースホルダー 5">
             <a:extLst>
               <a:ext uri="{FF2B5EF4-FFF2-40B4-BE49-F238E27FC236}">
-                <a16:creationId xmlns:a16="http://schemas.microsoft.com/office/drawing/2014/main" id="{5F453956-B0B5-5D9E-D7A6-BBE876B5D988}"/>
+                <a16:creationId xmlns:a16="http://schemas.microsoft.com/office/drawing/2014/main" id="{806302F5-8ED8-ADB3-4F4A-AED6BBA45EDD}"/>
               </a:ext>
             </a:extLst>
           </p:cNvPr>
@@ -3285,7 +3285,7 @@
             </a:lvl1pPr>
           </a:lstStyle>
           <a:p>
-            <a:fld id="{2C7A2EAF-E281-4385-A315-A242EF19D0A8}" type="slidenum">
+            <a:fld id="{41ED1192-F97A-4203-869B-87C54365C7EB}" type="slidenum">
               <a:rPr kumimoji="1" lang="ja-JP" altLang="en-US" smtClean="0"/>
               <a:t>‹#›</a:t>
             </a:fld>
@@ -3296,7 +3296,7 @@
     </p:spTree>
     <p:extLst>
       <p:ext uri="{BB962C8B-B14F-4D97-AF65-F5344CB8AC3E}">
-        <p14:creationId xmlns:p14="http://schemas.microsoft.com/office/powerpoint/2010/main" val="245844585"/>
+        <p14:creationId xmlns:p14="http://schemas.microsoft.com/office/powerpoint/2010/main" val="1862919350"/>
       </p:ext>
     </p:extLst>
   </p:cSld>
@@ -3619,7 +3619,7 @@
           <p:cNvPr id="2" name="テキスト ボックス 1">
             <a:extLst>
               <a:ext uri="{FF2B5EF4-FFF2-40B4-BE49-F238E27FC236}">
-                <a16:creationId xmlns:a16="http://schemas.microsoft.com/office/drawing/2014/main" id="{2EA4AC46-26B9-D951-6E65-5ED376E3D087}"/>
+                <a16:creationId xmlns:a16="http://schemas.microsoft.com/office/drawing/2014/main" id="{331453F6-D72A-FCA6-BC34-288330EAC06E}"/>
               </a:ext>
             </a:extLst>
           </p:cNvPr>
@@ -3665,7 +3665,7 @@
           <p:cNvPr id="3" name="テキスト ボックス 2">
             <a:extLst>
               <a:ext uri="{FF2B5EF4-FFF2-40B4-BE49-F238E27FC236}">
-                <a16:creationId xmlns:a16="http://schemas.microsoft.com/office/drawing/2014/main" id="{6CBF8966-BDE8-44E7-82DB-CFA8A31BB983}"/>
+                <a16:creationId xmlns:a16="http://schemas.microsoft.com/office/drawing/2014/main" id="{ABEB08A6-6223-567C-1CE7-C961F220CED4}"/>
               </a:ext>
             </a:extLst>
           </p:cNvPr>
@@ -3695,14 +3695,17 @@
                 </a:solidFill>
                 <a:latin typeface="Arial" panose="020B0604020202020204" pitchFamily="34" charset="0"/>
               </a:rPr>
-              <a:t>tsumiage-log TECH EXPLANATION</a:t>
-            </a:r>
-            <a:endParaRPr kumimoji="1" lang="ja-JP" altLang="en-US" sz="3400" b="1">
-              <a:solidFill>
-                <a:srgbClr val="111111"/>
-              </a:solidFill>
-              <a:latin typeface="Arial" panose="020B0604020202020204" pitchFamily="34" charset="0"/>
-            </a:endParaRPr>
+              <a:t>Tsumiage Log</a:t>
+            </a:r>
+            <a:r>
+              <a:rPr kumimoji="1" lang="ja-JP" altLang="en-US" sz="3400" b="1">
+                <a:solidFill>
+                  <a:srgbClr val="111111"/>
+                </a:solidFill>
+                <a:latin typeface="Arial" panose="020B0604020202020204" pitchFamily="34" charset="0"/>
+              </a:rPr>
+              <a:t>の技術解説</a:t>
+            </a:r>
           </a:p>
         </p:txBody>
       </p:sp>
@@ -3711,7 +3714,7 @@
           <p:cNvPr id="4" name="テキスト ボックス 3">
             <a:extLst>
               <a:ext uri="{FF2B5EF4-FFF2-40B4-BE49-F238E27FC236}">
-                <a16:creationId xmlns:a16="http://schemas.microsoft.com/office/drawing/2014/main" id="{917ECB51-3020-9A6B-86AE-E6A92B2EFA15}"/>
+                <a16:creationId xmlns:a16="http://schemas.microsoft.com/office/drawing/2014/main" id="{5D1625CC-FF13-ECD9-C1E0-41AF22F53D01}"/>
               </a:ext>
             </a:extLst>
           </p:cNvPr>
@@ -3735,20 +3738,14 @@
           <a:lstStyle/>
           <a:p>
             <a:r>
-              <a:rPr kumimoji="1" lang="en-US" altLang="ja-JP" sz="2000">
+              <a:rPr kumimoji="1" lang="ja-JP" altLang="en-US" sz="2000">
                 <a:solidFill>
                   <a:srgbClr val="333333"/>
                 </a:solidFill>
                 <a:latin typeface="Arial" panose="020B0604020202020204" pitchFamily="34" charset="0"/>
               </a:rPr>
-              <a:t>Architecture, implementation and commit history in 75 seconds</a:t>
-            </a:r>
-            <a:endParaRPr kumimoji="1" lang="ja-JP" altLang="en-US" sz="2000">
-              <a:solidFill>
-                <a:srgbClr val="333333"/>
-              </a:solidFill>
-              <a:latin typeface="Arial" panose="020B0604020202020204" pitchFamily="34" charset="0"/>
-            </a:endParaRPr>
+              <a:t>設計・実装・コミットから学ぶ短時間プレビュー</a:t>
+            </a:r>
           </a:p>
         </p:txBody>
       </p:sp>
@@ -3757,7 +3754,7 @@
           <p:cNvPr id="5" name="テキスト ボックス 4">
             <a:extLst>
               <a:ext uri="{FF2B5EF4-FFF2-40B4-BE49-F238E27FC236}">
-                <a16:creationId xmlns:a16="http://schemas.microsoft.com/office/drawing/2014/main" id="{66955704-3CF3-9FB5-94D1-FAE4684AEC20}"/>
+                <a16:creationId xmlns:a16="http://schemas.microsoft.com/office/drawing/2014/main" id="{4FF5459E-A2F5-AD49-1023-B722ECFA1CFE}"/>
               </a:ext>
             </a:extLst>
           </p:cNvPr>
@@ -3804,7 +3801,7 @@
             <a:hlinkClick r:id="" action="ppaction://media"/>
             <a:extLst>
               <a:ext uri="{FF2B5EF4-FFF2-40B4-BE49-F238E27FC236}">
-                <a16:creationId xmlns:a16="http://schemas.microsoft.com/office/drawing/2014/main" id="{87C5AEA9-BC46-FEC6-E97D-1642893C193F}"/>
+                <a16:creationId xmlns:a16="http://schemas.microsoft.com/office/drawing/2014/main" id="{EC82F9C6-0955-0D69-08EC-13E60811D37B}"/>
               </a:ext>
             </a:extLst>
           </p:cNvPr>
@@ -3839,7 +3836,7 @@
     </p:spTree>
     <p:extLst>
       <p:ext uri="{BB962C8B-B14F-4D97-AF65-F5344CB8AC3E}">
-        <p14:creationId xmlns:p14="http://schemas.microsoft.com/office/powerpoint/2010/main" val="2598677079"/>
+        <p14:creationId xmlns:p14="http://schemas.microsoft.com/office/powerpoint/2010/main" val="3172514727"/>
       </p:ext>
     </p:extLst>
   </p:cSld>
@@ -3963,7 +3960,7 @@
           <p:cNvPr id="2" name="テキスト ボックス 1">
             <a:extLst>
               <a:ext uri="{FF2B5EF4-FFF2-40B4-BE49-F238E27FC236}">
-                <a16:creationId xmlns:a16="http://schemas.microsoft.com/office/drawing/2014/main" id="{C46BDFB9-B52A-1A71-CDB7-00A4D07E09A0}"/>
+                <a16:creationId xmlns:a16="http://schemas.microsoft.com/office/drawing/2014/main" id="{B3C035F0-F009-8C7F-B675-B7B9195E9166}"/>
               </a:ext>
             </a:extLst>
           </p:cNvPr>
@@ -4009,7 +4006,7 @@
           <p:cNvPr id="3" name="テキスト ボックス 2">
             <a:extLst>
               <a:ext uri="{FF2B5EF4-FFF2-40B4-BE49-F238E27FC236}">
-                <a16:creationId xmlns:a16="http://schemas.microsoft.com/office/drawing/2014/main" id="{3D2ECF48-643D-2215-C66D-CB848C7E0687}"/>
+                <a16:creationId xmlns:a16="http://schemas.microsoft.com/office/drawing/2014/main" id="{1BFA0F9A-B695-6113-D0CB-A7869B66FFD8}"/>
               </a:ext>
             </a:extLst>
           </p:cNvPr>
@@ -4033,20 +4030,14 @@
           <a:lstStyle/>
           <a:p>
             <a:r>
-              <a:rPr kumimoji="1" lang="en-US" altLang="ja-JP" sz="3400" b="1">
+              <a:rPr kumimoji="1" lang="ja-JP" altLang="en-US" sz="3400" b="1">
                 <a:solidFill>
                   <a:srgbClr val="111111"/>
                 </a:solidFill>
                 <a:latin typeface="Arial" panose="020B0604020202020204" pitchFamily="34" charset="0"/>
               </a:rPr>
-              <a:t>WHAT DOES IT SOLVE?</a:t>
-            </a:r>
-            <a:endParaRPr kumimoji="1" lang="ja-JP" altLang="en-US" sz="3400" b="1">
-              <a:solidFill>
-                <a:srgbClr val="111111"/>
-              </a:solidFill>
-              <a:latin typeface="Arial" panose="020B0604020202020204" pitchFamily="34" charset="0"/>
-            </a:endParaRPr>
+              <a:t>このプロジェクトは何を解決する？</a:t>
+            </a:r>
           </a:p>
         </p:txBody>
       </p:sp>
@@ -4055,7 +4046,7 @@
           <p:cNvPr id="4" name="テキスト ボックス 3">
             <a:extLst>
               <a:ext uri="{FF2B5EF4-FFF2-40B4-BE49-F238E27FC236}">
-                <a16:creationId xmlns:a16="http://schemas.microsoft.com/office/drawing/2014/main" id="{D12FAF2D-23F0-E21F-52C4-5691CD5C435D}"/>
+                <a16:creationId xmlns:a16="http://schemas.microsoft.com/office/drawing/2014/main" id="{39C39B97-4A0B-43DE-6D2B-99528EEFFDF4}"/>
               </a:ext>
             </a:extLst>
           </p:cNvPr>
@@ -4113,7 +4104,7 @@
           <p:cNvPr id="5" name="テキスト ボックス 4">
             <a:extLst>
               <a:ext uri="{FF2B5EF4-FFF2-40B4-BE49-F238E27FC236}">
-                <a16:creationId xmlns:a16="http://schemas.microsoft.com/office/drawing/2014/main" id="{A54B81D9-503C-CD5C-1C71-4ADB91A98B6D}"/>
+                <a16:creationId xmlns:a16="http://schemas.microsoft.com/office/drawing/2014/main" id="{E85FE382-F315-00C2-AE1E-B3773ECBC465}"/>
               </a:ext>
             </a:extLst>
           </p:cNvPr>
@@ -4160,7 +4151,7 @@
             <a:hlinkClick r:id="" action="ppaction://media"/>
             <a:extLst>
               <a:ext uri="{FF2B5EF4-FFF2-40B4-BE49-F238E27FC236}">
-                <a16:creationId xmlns:a16="http://schemas.microsoft.com/office/drawing/2014/main" id="{EB96416E-A6F7-7DF4-7C2E-3815FB094F34}"/>
+                <a16:creationId xmlns:a16="http://schemas.microsoft.com/office/drawing/2014/main" id="{18B71C62-0A1B-9A6F-DA7A-0F5BBBDDBF17}"/>
               </a:ext>
             </a:extLst>
           </p:cNvPr>
@@ -4195,7 +4186,7 @@
     </p:spTree>
     <p:extLst>
       <p:ext uri="{BB962C8B-B14F-4D97-AF65-F5344CB8AC3E}">
-        <p14:creationId xmlns:p14="http://schemas.microsoft.com/office/powerpoint/2010/main" val="3872198498"/>
+        <p14:creationId xmlns:p14="http://schemas.microsoft.com/office/powerpoint/2010/main" val="3128020358"/>
       </p:ext>
     </p:extLst>
   </p:cSld>
@@ -4319,7 +4310,7 @@
           <p:cNvPr id="2" name="テキスト ボックス 1">
             <a:extLst>
               <a:ext uri="{FF2B5EF4-FFF2-40B4-BE49-F238E27FC236}">
-                <a16:creationId xmlns:a16="http://schemas.microsoft.com/office/drawing/2014/main" id="{7116BB5B-0716-36AD-9B1A-048E5E4B5870}"/>
+                <a16:creationId xmlns:a16="http://schemas.microsoft.com/office/drawing/2014/main" id="{CAB6741F-1D5B-EE74-8932-D44F77DF3B29}"/>
               </a:ext>
             </a:extLst>
           </p:cNvPr>
@@ -4365,7 +4356,7 @@
           <p:cNvPr id="3" name="テキスト ボックス 2">
             <a:extLst>
               <a:ext uri="{FF2B5EF4-FFF2-40B4-BE49-F238E27FC236}">
-                <a16:creationId xmlns:a16="http://schemas.microsoft.com/office/drawing/2014/main" id="{18E47CF9-7ADA-59FF-6A6A-E56C9E59B463}"/>
+                <a16:creationId xmlns:a16="http://schemas.microsoft.com/office/drawing/2014/main" id="{FFA415D6-1726-8938-0A92-B863B96C3514}"/>
               </a:ext>
             </a:extLst>
           </p:cNvPr>
@@ -4389,20 +4380,14 @@
           <a:lstStyle/>
           <a:p>
             <a:r>
-              <a:rPr kumimoji="1" lang="en-US" altLang="ja-JP" sz="3400" b="1">
+              <a:rPr kumimoji="1" lang="ja-JP" altLang="en-US" sz="3400" b="1">
                 <a:solidFill>
                   <a:srgbClr val="111111"/>
                 </a:solidFill>
                 <a:latin typeface="Arial" panose="020B0604020202020204" pitchFamily="34" charset="0"/>
               </a:rPr>
-              <a:t>TECH STACK</a:t>
-            </a:r>
-            <a:endParaRPr kumimoji="1" lang="ja-JP" altLang="en-US" sz="3400" b="1">
-              <a:solidFill>
-                <a:srgbClr val="111111"/>
-              </a:solidFill>
-              <a:latin typeface="Arial" panose="020B0604020202020204" pitchFamily="34" charset="0"/>
-            </a:endParaRPr>
+              <a:t>技術スタック</a:t>
+            </a:r>
           </a:p>
         </p:txBody>
       </p:sp>
@@ -4411,7 +4396,7 @@
           <p:cNvPr id="4" name="テキスト ボックス 3">
             <a:extLst>
               <a:ext uri="{FF2B5EF4-FFF2-40B4-BE49-F238E27FC236}">
-                <a16:creationId xmlns:a16="http://schemas.microsoft.com/office/drawing/2014/main" id="{02316A5C-7E90-4461-9C08-7F149DA27640}"/>
+                <a16:creationId xmlns:a16="http://schemas.microsoft.com/office/drawing/2014/main" id="{05FD2849-CD5A-7DC9-6F0B-FCE1F88963B8}"/>
               </a:ext>
             </a:extLst>
           </p:cNvPr>
@@ -4421,7 +4406,7 @@
         <p:spPr>
           <a:xfrm>
             <a:off x="533400" y="3429000"/>
-            <a:ext cx="10795000" cy="400110"/>
+            <a:ext cx="10795000" cy="707886"/>
           </a:xfrm>
           <a:prstGeom prst="rect">
             <a:avLst/>
@@ -4435,13 +4420,22 @@
           <a:lstStyle/>
           <a:p>
             <a:r>
+              <a:rPr kumimoji="1" lang="ja-JP" altLang="en-US" sz="2000">
+                <a:solidFill>
+                  <a:srgbClr val="333333"/>
+                </a:solidFill>
+                <a:latin typeface="Arial" panose="020B0604020202020204" pitchFamily="34" charset="0"/>
+              </a:rPr>
+              <a:t>主要技術：</a:t>
+            </a:r>
+            <a:r>
               <a:rPr kumimoji="1" lang="en-US" altLang="ja-JP" sz="2000">
                 <a:solidFill>
                   <a:srgbClr val="333333"/>
                 </a:solidFill>
                 <a:latin typeface="Arial" panose="020B0604020202020204" pitchFamily="34" charset="0"/>
               </a:rPr>
-              <a:t>Primary technologies: TypeScript</a:t>
+              <a:t>TypeScript</a:t>
             </a:r>
             <a:r>
               <a:rPr kumimoji="1" lang="ja-JP" altLang="en-US" sz="2000">
@@ -4477,14 +4471,18 @@
                 </a:solidFill>
                 <a:latin typeface="Arial" panose="020B0604020202020204" pitchFamily="34" charset="0"/>
               </a:rPr>
-              <a:t>JavaScript</a:t>
-            </a:r>
-            <a:endParaRPr kumimoji="1" lang="ja-JP" altLang="en-US" sz="2000">
-              <a:solidFill>
-                <a:srgbClr val="333333"/>
-              </a:solidFill>
-              <a:latin typeface="Arial" panose="020B0604020202020204" pitchFamily="34" charset="0"/>
-            </a:endParaRPr>
+              <a:t>JavaScript
+</a:t>
+            </a:r>
+            <a:r>
+              <a:rPr kumimoji="1" lang="ja-JP" altLang="en-US" sz="2000">
+                <a:solidFill>
+                  <a:srgbClr val="333333"/>
+                </a:solidFill>
+                <a:latin typeface="Arial" panose="020B0604020202020204" pitchFamily="34" charset="0"/>
+              </a:rPr>
+              <a:t>役割を分け、保守しやすい構成を目指しています。</a:t>
+            </a:r>
           </a:p>
         </p:txBody>
       </p:sp>
@@ -4493,7 +4491,7 @@
           <p:cNvPr id="5" name="テキスト ボックス 4">
             <a:extLst>
               <a:ext uri="{FF2B5EF4-FFF2-40B4-BE49-F238E27FC236}">
-                <a16:creationId xmlns:a16="http://schemas.microsoft.com/office/drawing/2014/main" id="{CCFA37B2-D303-3BCD-AED9-1E2C8BEE1021}"/>
+                <a16:creationId xmlns:a16="http://schemas.microsoft.com/office/drawing/2014/main" id="{AED084B6-F618-F28D-EC21-48F757531723}"/>
               </a:ext>
             </a:extLst>
           </p:cNvPr>
@@ -4540,7 +4538,7 @@
             <a:hlinkClick r:id="" action="ppaction://media"/>
             <a:extLst>
               <a:ext uri="{FF2B5EF4-FFF2-40B4-BE49-F238E27FC236}">
-                <a16:creationId xmlns:a16="http://schemas.microsoft.com/office/drawing/2014/main" id="{DB79AAB0-B75D-653E-8CA2-C60B7F8FEA6C}"/>
+                <a16:creationId xmlns:a16="http://schemas.microsoft.com/office/drawing/2014/main" id="{F85E292C-836B-7134-EE1B-977BE4A206AB}"/>
               </a:ext>
             </a:extLst>
           </p:cNvPr>
@@ -4575,7 +4573,7 @@
     </p:spTree>
     <p:extLst>
       <p:ext uri="{BB962C8B-B14F-4D97-AF65-F5344CB8AC3E}">
-        <p14:creationId xmlns:p14="http://schemas.microsoft.com/office/powerpoint/2010/main" val="3504213150"/>
+        <p14:creationId xmlns:p14="http://schemas.microsoft.com/office/powerpoint/2010/main" val="2191949567"/>
       </p:ext>
     </p:extLst>
   </p:cSld>
@@ -4699,7 +4697,7 @@
           <p:cNvPr id="2" name="テキスト ボックス 1">
             <a:extLst>
               <a:ext uri="{FF2B5EF4-FFF2-40B4-BE49-F238E27FC236}">
-                <a16:creationId xmlns:a16="http://schemas.microsoft.com/office/drawing/2014/main" id="{9277F501-E1DD-CFEE-F98D-AD7FC97AAF19}"/>
+                <a16:creationId xmlns:a16="http://schemas.microsoft.com/office/drawing/2014/main" id="{65DE3A38-9CFA-821F-7A87-C67759C15D16}"/>
               </a:ext>
             </a:extLst>
           </p:cNvPr>
@@ -4745,7 +4743,7 @@
           <p:cNvPr id="3" name="テキスト ボックス 2">
             <a:extLst>
               <a:ext uri="{FF2B5EF4-FFF2-40B4-BE49-F238E27FC236}">
-                <a16:creationId xmlns:a16="http://schemas.microsoft.com/office/drawing/2014/main" id="{46BAFF17-6E49-C203-FE6E-4190888B2543}"/>
+                <a16:creationId xmlns:a16="http://schemas.microsoft.com/office/drawing/2014/main" id="{5B8E0BDD-B0B7-E85B-526C-AD87FE013EF3}"/>
               </a:ext>
             </a:extLst>
           </p:cNvPr>
@@ -4769,20 +4767,14 @@
           <a:lstStyle/>
           <a:p>
             <a:r>
-              <a:rPr kumimoji="1" lang="en-US" altLang="ja-JP" sz="3400" b="1">
+              <a:rPr kumimoji="1" lang="ja-JP" altLang="en-US" sz="3400" b="1">
                 <a:solidFill>
                   <a:srgbClr val="111111"/>
                 </a:solidFill>
                 <a:latin typeface="Arial" panose="020B0604020202020204" pitchFamily="34" charset="0"/>
               </a:rPr>
-              <a:t>REPOSITORY HIGHLIGHTS</a:t>
-            </a:r>
-            <a:endParaRPr kumimoji="1" lang="ja-JP" altLang="en-US" sz="3400" b="1">
-              <a:solidFill>
-                <a:srgbClr val="111111"/>
-              </a:solidFill>
-              <a:latin typeface="Arial" panose="020B0604020202020204" pitchFamily="34" charset="0"/>
-            </a:endParaRPr>
+              <a:t>リポジトリの読みどころ</a:t>
+            </a:r>
           </a:p>
         </p:txBody>
       </p:sp>
@@ -4791,7 +4783,7 @@
           <p:cNvPr id="4" name="テキスト ボックス 3">
             <a:extLst>
               <a:ext uri="{FF2B5EF4-FFF2-40B4-BE49-F238E27FC236}">
-                <a16:creationId xmlns:a16="http://schemas.microsoft.com/office/drawing/2014/main" id="{95F1D447-4FD9-DCB4-CB73-93474BD39992}"/>
+                <a16:creationId xmlns:a16="http://schemas.microsoft.com/office/drawing/2014/main" id="{0FE96185-E239-5F95-476F-076AE022D725}"/>
               </a:ext>
             </a:extLst>
           </p:cNvPr>
@@ -4801,7 +4793,7 @@
         <p:spPr>
           <a:xfrm>
             <a:off x="533400" y="3429000"/>
-            <a:ext cx="10795000" cy="400110"/>
+            <a:ext cx="10795000" cy="707886"/>
           </a:xfrm>
           <a:prstGeom prst="rect">
             <a:avLst/>
@@ -4815,13 +4807,77 @@
           <a:lstStyle/>
           <a:p>
             <a:r>
+              <a:rPr kumimoji="1" lang="ja-JP" altLang="en-US" sz="2000">
+                <a:solidFill>
+                  <a:srgbClr val="333333"/>
+                </a:solidFill>
+                <a:latin typeface="Arial" panose="020B0604020202020204" pitchFamily="34" charset="0"/>
+              </a:rPr>
+              <a:t>公開コード、</a:t>
+            </a:r>
+            <a:r>
               <a:rPr kumimoji="1" lang="en-US" altLang="ja-JP" sz="2000">
                 <a:solidFill>
                   <a:srgbClr val="333333"/>
                 </a:solidFill>
                 <a:latin typeface="Arial" panose="020B0604020202020204" pitchFamily="34" charset="0"/>
               </a:rPr>
-              <a:t>Public source code, README and commit history reveal the design decisions.</a:t>
+              <a:t>README</a:t>
+            </a:r>
+            <a:r>
+              <a:rPr kumimoji="1" lang="ja-JP" altLang="en-US" sz="2000">
+                <a:solidFill>
+                  <a:srgbClr val="333333"/>
+                </a:solidFill>
+                <a:latin typeface="Arial" panose="020B0604020202020204" pitchFamily="34" charset="0"/>
+              </a:rPr>
+              <a:t>、コミット履歴から設計判断を確認できます。
+主なファイル：</a:t>
+            </a:r>
+            <a:r>
+              <a:rPr kumimoji="1" lang="en-US" altLang="ja-JP" sz="2000">
+                <a:solidFill>
+                  <a:srgbClr val="333333"/>
+                </a:solidFill>
+                <a:latin typeface="Arial" panose="020B0604020202020204" pitchFamily="34" charset="0"/>
+              </a:rPr>
+              <a:t>README.md</a:t>
+            </a:r>
+            <a:r>
+              <a:rPr kumimoji="1" lang="ja-JP" altLang="en-US" sz="2000">
+                <a:solidFill>
+                  <a:srgbClr val="333333"/>
+                </a:solidFill>
+                <a:latin typeface="Arial" panose="020B0604020202020204" pitchFamily="34" charset="0"/>
+              </a:rPr>
+              <a:t>、</a:t>
+            </a:r>
+            <a:r>
+              <a:rPr kumimoji="1" lang="en-US" altLang="ja-JP" sz="2000">
+                <a:solidFill>
+                  <a:srgbClr val="333333"/>
+                </a:solidFill>
+                <a:latin typeface="Arial" panose="020B0604020202020204" pitchFamily="34" charset="0"/>
+              </a:rPr>
+              <a:t>app</a:t>
+            </a:r>
+            <a:r>
+              <a:rPr kumimoji="1" lang="ja-JP" altLang="en-US" sz="2000">
+                <a:solidFill>
+                  <a:srgbClr val="333333"/>
+                </a:solidFill>
+                <a:latin typeface="Arial" panose="020B0604020202020204" pitchFamily="34" charset="0"/>
+              </a:rPr>
+              <a:t>、</a:t>
+            </a:r>
+            <a:r>
+              <a:rPr kumimoji="1" lang="en-US" altLang="ja-JP" sz="2000">
+                <a:solidFill>
+                  <a:srgbClr val="333333"/>
+                </a:solidFill>
+                <a:latin typeface="Arial" panose="020B0604020202020204" pitchFamily="34" charset="0"/>
+              </a:rPr>
+              <a:t>build</a:t>
             </a:r>
             <a:endParaRPr kumimoji="1" lang="ja-JP" altLang="en-US" sz="2000">
               <a:solidFill>
@@ -4837,7 +4893,7 @@
           <p:cNvPr id="5" name="テキスト ボックス 4">
             <a:extLst>
               <a:ext uri="{FF2B5EF4-FFF2-40B4-BE49-F238E27FC236}">
-                <a16:creationId xmlns:a16="http://schemas.microsoft.com/office/drawing/2014/main" id="{01882379-1614-75B9-D503-20C2BC32DA71}"/>
+                <a16:creationId xmlns:a16="http://schemas.microsoft.com/office/drawing/2014/main" id="{6AE7A4EB-8829-432E-BF74-8D2DA18015A6}"/>
               </a:ext>
             </a:extLst>
           </p:cNvPr>
@@ -4884,7 +4940,7 @@
             <a:hlinkClick r:id="" action="ppaction://media"/>
             <a:extLst>
               <a:ext uri="{FF2B5EF4-FFF2-40B4-BE49-F238E27FC236}">
-                <a16:creationId xmlns:a16="http://schemas.microsoft.com/office/drawing/2014/main" id="{6B73F2EB-96A8-E25E-8F6D-D3DECFD007DD}"/>
+                <a16:creationId xmlns:a16="http://schemas.microsoft.com/office/drawing/2014/main" id="{A04EA59D-A356-7150-588E-B6B5180DBAAB}"/>
               </a:ext>
             </a:extLst>
           </p:cNvPr>
@@ -4919,7 +4975,7 @@
     </p:spTree>
     <p:extLst>
       <p:ext uri="{BB962C8B-B14F-4D97-AF65-F5344CB8AC3E}">
-        <p14:creationId xmlns:p14="http://schemas.microsoft.com/office/powerpoint/2010/main" val="1168599644"/>
+        <p14:creationId xmlns:p14="http://schemas.microsoft.com/office/powerpoint/2010/main" val="2956081609"/>
       </p:ext>
     </p:extLst>
   </p:cSld>
@@ -5043,7 +5099,7 @@
           <p:cNvPr id="2" name="テキスト ボックス 1">
             <a:extLst>
               <a:ext uri="{FF2B5EF4-FFF2-40B4-BE49-F238E27FC236}">
-                <a16:creationId xmlns:a16="http://schemas.microsoft.com/office/drawing/2014/main" id="{C77B1665-ACE2-0852-5FA9-6C1FA93C4905}"/>
+                <a16:creationId xmlns:a16="http://schemas.microsoft.com/office/drawing/2014/main" id="{DA91B4FA-0F22-DD91-8746-18D61B5AA542}"/>
               </a:ext>
             </a:extLst>
           </p:cNvPr>
@@ -5089,7 +5145,7 @@
           <p:cNvPr id="3" name="テキスト ボックス 2">
             <a:extLst>
               <a:ext uri="{FF2B5EF4-FFF2-40B4-BE49-F238E27FC236}">
-                <a16:creationId xmlns:a16="http://schemas.microsoft.com/office/drawing/2014/main" id="{4E581BE8-DDC5-CD5C-F3CE-BEBED230EA74}"/>
+                <a16:creationId xmlns:a16="http://schemas.microsoft.com/office/drawing/2014/main" id="{9395B8B3-65F5-AC90-2DAF-A2BEF5658463}"/>
               </a:ext>
             </a:extLst>
           </p:cNvPr>
@@ -5113,20 +5169,14 @@
           <a:lstStyle/>
           <a:p>
             <a:r>
-              <a:rPr kumimoji="1" lang="en-US" altLang="ja-JP" sz="3400" b="1">
+              <a:rPr kumimoji="1" lang="ja-JP" altLang="en-US" sz="3400" b="1">
                 <a:solidFill>
                   <a:srgbClr val="111111"/>
                 </a:solidFill>
                 <a:latin typeface="Arial" panose="020B0604020202020204" pitchFamily="34" charset="0"/>
               </a:rPr>
-              <a:t>ITERATIVE IMPROVEMENT</a:t>
-            </a:r>
-            <a:endParaRPr kumimoji="1" lang="ja-JP" altLang="en-US" sz="3400" b="1">
-              <a:solidFill>
-                <a:srgbClr val="111111"/>
-              </a:solidFill>
-              <a:latin typeface="Arial" panose="020B0604020202020204" pitchFamily="34" charset="0"/>
-            </a:endParaRPr>
+              <a:t>コミットから分かる改善</a:t>
+            </a:r>
           </a:p>
         </p:txBody>
       </p:sp>
@@ -5135,7 +5185,7 @@
           <p:cNvPr id="4" name="テキスト ボックス 3">
             <a:extLst>
               <a:ext uri="{FF2B5EF4-FFF2-40B4-BE49-F238E27FC236}">
-                <a16:creationId xmlns:a16="http://schemas.microsoft.com/office/drawing/2014/main" id="{3506DCEC-04AD-8073-A27B-D52AFE874DD2}"/>
+                <a16:creationId xmlns:a16="http://schemas.microsoft.com/office/drawing/2014/main" id="{C97DAE5A-6929-E958-5CB6-439A2642F0EF}"/>
               </a:ext>
             </a:extLst>
           </p:cNvPr>
@@ -5159,13 +5209,13 @@
           <a:lstStyle/>
           <a:p>
             <a:r>
-              <a:rPr kumimoji="1" lang="en-US" altLang="ja-JP" sz="2000">
+              <a:rPr kumimoji="1" lang="fr-FR" altLang="ja-JP" sz="2000">
                 <a:solidFill>
                   <a:srgbClr val="333333"/>
                 </a:solidFill>
                 <a:latin typeface="Arial" panose="020B0604020202020204" pitchFamily="34" charset="0"/>
               </a:rPr>
-              <a:t>Small commits continuously improve features, quality and release readiness.</a:t>
+              <a:t>Fix repository article automation exclusions</a:t>
             </a:r>
             <a:endParaRPr kumimoji="1" lang="ja-JP" altLang="en-US" sz="2000">
               <a:solidFill>
@@ -5181,7 +5231,7 @@
           <p:cNvPr id="5" name="テキスト ボックス 4">
             <a:extLst>
               <a:ext uri="{FF2B5EF4-FFF2-40B4-BE49-F238E27FC236}">
-                <a16:creationId xmlns:a16="http://schemas.microsoft.com/office/drawing/2014/main" id="{81657FF0-9A43-26BC-C709-2A1F2130D1E0}"/>
+                <a16:creationId xmlns:a16="http://schemas.microsoft.com/office/drawing/2014/main" id="{77BAB587-1D33-2643-BD83-6A44F806B038}"/>
               </a:ext>
             </a:extLst>
           </p:cNvPr>
@@ -5228,7 +5278,7 @@
             <a:hlinkClick r:id="" action="ppaction://media"/>
             <a:extLst>
               <a:ext uri="{FF2B5EF4-FFF2-40B4-BE49-F238E27FC236}">
-                <a16:creationId xmlns:a16="http://schemas.microsoft.com/office/drawing/2014/main" id="{AC598D6E-39AE-928A-1515-3EF56058C921}"/>
+                <a16:creationId xmlns:a16="http://schemas.microsoft.com/office/drawing/2014/main" id="{33D00317-5009-6D8C-A9D4-4A05DBCD156E}"/>
               </a:ext>
             </a:extLst>
           </p:cNvPr>
@@ -5263,7 +5313,7 @@
     </p:spTree>
     <p:extLst>
       <p:ext uri="{BB962C8B-B14F-4D97-AF65-F5344CB8AC3E}">
-        <p14:creationId xmlns:p14="http://schemas.microsoft.com/office/powerpoint/2010/main" val="3571563760"/>
+        <p14:creationId xmlns:p14="http://schemas.microsoft.com/office/powerpoint/2010/main" val="898215970"/>
       </p:ext>
     </p:extLst>
   </p:cSld>
@@ -5387,7 +5437,7 @@
           <p:cNvPr id="2" name="テキスト ボックス 1">
             <a:extLst>
               <a:ext uri="{FF2B5EF4-FFF2-40B4-BE49-F238E27FC236}">
-                <a16:creationId xmlns:a16="http://schemas.microsoft.com/office/drawing/2014/main" id="{BCFD27DF-1FB2-BFD6-4A52-0F4C520244FA}"/>
+                <a16:creationId xmlns:a16="http://schemas.microsoft.com/office/drawing/2014/main" id="{1D5A5A25-9153-2385-CFE6-43FA3DDBBD38}"/>
               </a:ext>
             </a:extLst>
           </p:cNvPr>
@@ -5433,7 +5483,7 @@
           <p:cNvPr id="3" name="テキスト ボックス 2">
             <a:extLst>
               <a:ext uri="{FF2B5EF4-FFF2-40B4-BE49-F238E27FC236}">
-                <a16:creationId xmlns:a16="http://schemas.microsoft.com/office/drawing/2014/main" id="{4EBC5789-8A61-8E60-6481-07B99E1FCDFE}"/>
+                <a16:creationId xmlns:a16="http://schemas.microsoft.com/office/drawing/2014/main" id="{D01B69CD-6383-14FC-5EAD-BEA6DC2334F3}"/>
               </a:ext>
             </a:extLst>
           </p:cNvPr>
@@ -5457,20 +5507,14 @@
           <a:lstStyle/>
           <a:p>
             <a:r>
-              <a:rPr kumimoji="1" lang="en-US" altLang="ja-JP" sz="3400" b="1">
+              <a:rPr kumimoji="1" lang="ja-JP" altLang="en-US" sz="3400" b="1">
                 <a:solidFill>
                   <a:srgbClr val="111111"/>
                 </a:solidFill>
                 <a:latin typeface="Arial" panose="020B0604020202020204" pitchFamily="34" charset="0"/>
               </a:rPr>
-              <a:t>READ THE FULL ARTICLE</a:t>
-            </a:r>
-            <a:endParaRPr kumimoji="1" lang="ja-JP" altLang="en-US" sz="3400" b="1">
-              <a:solidFill>
-                <a:srgbClr val="111111"/>
-              </a:solidFill>
-              <a:latin typeface="Arial" panose="020B0604020202020204" pitchFamily="34" charset="0"/>
-            </a:endParaRPr>
+              <a:t>詳しくは積み上げログへ</a:t>
+            </a:r>
           </a:p>
         </p:txBody>
       </p:sp>
@@ -5479,7 +5523,7 @@
           <p:cNvPr id="4" name="テキスト ボックス 3">
             <a:extLst>
               <a:ext uri="{FF2B5EF4-FFF2-40B4-BE49-F238E27FC236}">
-                <a16:creationId xmlns:a16="http://schemas.microsoft.com/office/drawing/2014/main" id="{4E43A13B-AC18-2CD5-26C0-CD597668B216}"/>
+                <a16:creationId xmlns:a16="http://schemas.microsoft.com/office/drawing/2014/main" id="{88811672-9848-0104-0BF9-88F4DB460CB1}"/>
               </a:ext>
             </a:extLst>
           </p:cNvPr>
@@ -5503,14 +5547,32 @@
           <a:lstStyle/>
           <a:p>
             <a:r>
-              <a:rPr kumimoji="1" lang="sv-SE" altLang="ja-JP" sz="2000">
+              <a:rPr kumimoji="1" lang="zh-TW" altLang="en-US" sz="2000">
+                <a:solidFill>
+                  <a:srgbClr val="333333"/>
+                </a:solidFill>
+                <a:latin typeface="Arial" panose="020B0604020202020204" pitchFamily="34" charset="0"/>
+              </a:rPr>
+              <a:t>記事： </a:t>
+            </a:r>
+            <a:r>
+              <a:rPr kumimoji="1" lang="en-US" altLang="zh-TW" sz="2000">
                 <a:solidFill>
                   <a:srgbClr val="333333"/>
                 </a:solidFill>
                 <a:latin typeface="Arial" panose="020B0604020202020204" pitchFamily="34" charset="0"/>
               </a:rPr>
               <a:t>https://syunnjack.dev/articles/tsumiage-log
-TSUMIAGE LOG</a:t>
+</a:t>
+            </a:r>
+            <a:r>
+              <a:rPr kumimoji="1" lang="zh-TW" altLang="en-US" sz="2000">
+                <a:solidFill>
+                  <a:srgbClr val="333333"/>
+                </a:solidFill>
+                <a:latin typeface="Arial" panose="020B0604020202020204" pitchFamily="34" charset="0"/>
+              </a:rPr>
+              <a:t>学び、作り、振り返る開発記録。</a:t>
             </a:r>
             <a:endParaRPr kumimoji="1" lang="ja-JP" altLang="en-US" sz="2000">
               <a:solidFill>
@@ -5526,7 +5588,7 @@
           <p:cNvPr id="5" name="テキスト ボックス 4">
             <a:extLst>
               <a:ext uri="{FF2B5EF4-FFF2-40B4-BE49-F238E27FC236}">
-                <a16:creationId xmlns:a16="http://schemas.microsoft.com/office/drawing/2014/main" id="{530BC7F2-F48E-DBAA-9942-46CEB2FC19EB}"/>
+                <a16:creationId xmlns:a16="http://schemas.microsoft.com/office/drawing/2014/main" id="{9CA484C2-359C-1A3B-F145-CEBE96E7EDA9}"/>
               </a:ext>
             </a:extLst>
           </p:cNvPr>
@@ -5573,7 +5635,7 @@
             <a:hlinkClick r:id="" action="ppaction://media"/>
             <a:extLst>
               <a:ext uri="{FF2B5EF4-FFF2-40B4-BE49-F238E27FC236}">
-                <a16:creationId xmlns:a16="http://schemas.microsoft.com/office/drawing/2014/main" id="{743B76D5-0868-F5CF-F1BC-6AD3B702ECDD}"/>
+                <a16:creationId xmlns:a16="http://schemas.microsoft.com/office/drawing/2014/main" id="{111A9BB0-7243-AD61-BC37-228239C343C2}"/>
               </a:ext>
             </a:extLst>
           </p:cNvPr>
@@ -5608,7 +5670,7 @@
     </p:spTree>
     <p:extLst>
       <p:ext uri="{BB962C8B-B14F-4D97-AF65-F5344CB8AC3E}">
-        <p14:creationId xmlns:p14="http://schemas.microsoft.com/office/powerpoint/2010/main" val="2950078730"/>
+        <p14:creationId xmlns:p14="http://schemas.microsoft.com/office/powerpoint/2010/main" val="4203411669"/>
       </p:ext>
     </p:extLst>
   </p:cSld>

--- a/public/videos/repositories/tsumiage-log/tsumiage-log-tech-preview.pptx
+++ b/public/videos/repositories/tsumiage-log/tsumiage-log-tech-preview.pptx
@@ -134,7 +134,7 @@
           <p:cNvPr id="2" name="タイトル 1">
             <a:extLst>
               <a:ext uri="{FF2B5EF4-FFF2-40B4-BE49-F238E27FC236}">
-                <a16:creationId xmlns:a16="http://schemas.microsoft.com/office/drawing/2014/main" id="{59096898-76A2-DFE5-BB44-BCFB48F1E608}"/>
+                <a16:creationId xmlns:a16="http://schemas.microsoft.com/office/drawing/2014/main" id="{5E67FABB-4CEE-4C28-1FEE-FF81D42154C4}"/>
               </a:ext>
             </a:extLst>
           </p:cNvPr>
@@ -171,7 +171,7 @@
           <p:cNvPr id="3" name="字幕 2">
             <a:extLst>
               <a:ext uri="{FF2B5EF4-FFF2-40B4-BE49-F238E27FC236}">
-                <a16:creationId xmlns:a16="http://schemas.microsoft.com/office/drawing/2014/main" id="{B2CD6A37-99D1-9DA7-4F77-738CD6536024}"/>
+                <a16:creationId xmlns:a16="http://schemas.microsoft.com/office/drawing/2014/main" id="{D7B5167E-78E1-64DE-113A-DD65AFD61B5B}"/>
               </a:ext>
             </a:extLst>
           </p:cNvPr>
@@ -241,7 +241,7 @@
           <p:cNvPr id="4" name="日付プレースホルダー 3">
             <a:extLst>
               <a:ext uri="{FF2B5EF4-FFF2-40B4-BE49-F238E27FC236}">
-                <a16:creationId xmlns:a16="http://schemas.microsoft.com/office/drawing/2014/main" id="{7C86134B-55E1-D901-83A3-455C7ECEF685}"/>
+                <a16:creationId xmlns:a16="http://schemas.microsoft.com/office/drawing/2014/main" id="{7CB7A506-0508-AB62-F8AB-BA60ABABD40E}"/>
               </a:ext>
             </a:extLst>
           </p:cNvPr>
@@ -257,7 +257,7 @@
           <a:bodyPr/>
           <a:lstStyle/>
           <a:p>
-            <a:fld id="{22A8C0A2-BA59-4CE8-827D-8EF6CB0A74B2}" type="datetimeFigureOut">
+            <a:fld id="{F738D116-0CAD-48A4-9434-6F4B4BD503EE}" type="datetimeFigureOut">
               <a:rPr kumimoji="1" lang="ja-JP" altLang="en-US" smtClean="0"/>
               <a:t>2026/7/30</a:t>
             </a:fld>
@@ -270,7 +270,7 @@
           <p:cNvPr id="5" name="フッター プレースホルダー 4">
             <a:extLst>
               <a:ext uri="{FF2B5EF4-FFF2-40B4-BE49-F238E27FC236}">
-                <a16:creationId xmlns:a16="http://schemas.microsoft.com/office/drawing/2014/main" id="{309ADDB3-F78E-442E-4150-59800E6EFDF3}"/>
+                <a16:creationId xmlns:a16="http://schemas.microsoft.com/office/drawing/2014/main" id="{9AA3C682-4C2E-B08A-9F23-6B1946C57158}"/>
               </a:ext>
             </a:extLst>
           </p:cNvPr>
@@ -295,7 +295,7 @@
           <p:cNvPr id="6" name="スライド番号プレースホルダー 5">
             <a:extLst>
               <a:ext uri="{FF2B5EF4-FFF2-40B4-BE49-F238E27FC236}">
-                <a16:creationId xmlns:a16="http://schemas.microsoft.com/office/drawing/2014/main" id="{0BDCCF7B-3ED8-6A5D-B68A-CF1C8533F9C5}"/>
+                <a16:creationId xmlns:a16="http://schemas.microsoft.com/office/drawing/2014/main" id="{0452DF76-7B83-51D8-5C96-99B254CE3624}"/>
               </a:ext>
             </a:extLst>
           </p:cNvPr>
@@ -311,7 +311,7 @@
           <a:bodyPr/>
           <a:lstStyle/>
           <a:p>
-            <a:fld id="{41ED1192-F97A-4203-869B-87C54365C7EB}" type="slidenum">
+            <a:fld id="{FCBF743A-36EF-4DED-90D4-ABFAA47045D1}" type="slidenum">
               <a:rPr kumimoji="1" lang="ja-JP" altLang="en-US" smtClean="0"/>
               <a:t>‹#›</a:t>
             </a:fld>
@@ -322,7 +322,7 @@
     </p:spTree>
     <p:extLst>
       <p:ext uri="{BB962C8B-B14F-4D97-AF65-F5344CB8AC3E}">
-        <p14:creationId xmlns:p14="http://schemas.microsoft.com/office/powerpoint/2010/main" val="2220169448"/>
+        <p14:creationId xmlns:p14="http://schemas.microsoft.com/office/powerpoint/2010/main" val="540117549"/>
       </p:ext>
     </p:extLst>
   </p:cSld>
@@ -354,7 +354,7 @@
           <p:cNvPr id="2" name="タイトル 1">
             <a:extLst>
               <a:ext uri="{FF2B5EF4-FFF2-40B4-BE49-F238E27FC236}">
-                <a16:creationId xmlns:a16="http://schemas.microsoft.com/office/drawing/2014/main" id="{9E8A6020-2649-4A7E-A04C-8E4076FFA223}"/>
+                <a16:creationId xmlns:a16="http://schemas.microsoft.com/office/drawing/2014/main" id="{3CE19DAA-FCDB-B2E8-C9C9-B9607F2E5414}"/>
               </a:ext>
             </a:extLst>
           </p:cNvPr>
@@ -382,7 +382,7 @@
           <p:cNvPr id="3" name="縦書きテキスト プレースホルダー 2">
             <a:extLst>
               <a:ext uri="{FF2B5EF4-FFF2-40B4-BE49-F238E27FC236}">
-                <a16:creationId xmlns:a16="http://schemas.microsoft.com/office/drawing/2014/main" id="{7DA678B0-3382-731F-DA9F-AEE57906D730}"/>
+                <a16:creationId xmlns:a16="http://schemas.microsoft.com/office/drawing/2014/main" id="{9FA04B23-D4CA-155F-A47B-460E853A133C}"/>
               </a:ext>
             </a:extLst>
           </p:cNvPr>
@@ -471,7 +471,7 @@
           <p:cNvPr id="4" name="日付プレースホルダー 3">
             <a:extLst>
               <a:ext uri="{FF2B5EF4-FFF2-40B4-BE49-F238E27FC236}">
-                <a16:creationId xmlns:a16="http://schemas.microsoft.com/office/drawing/2014/main" id="{73F98A2F-CFCD-3479-D5E6-B5BFAE6DC0C4}"/>
+                <a16:creationId xmlns:a16="http://schemas.microsoft.com/office/drawing/2014/main" id="{57B1E63D-47D9-3429-A8D2-410424B43B50}"/>
               </a:ext>
             </a:extLst>
           </p:cNvPr>
@@ -487,7 +487,7 @@
           <a:bodyPr/>
           <a:lstStyle/>
           <a:p>
-            <a:fld id="{22A8C0A2-BA59-4CE8-827D-8EF6CB0A74B2}" type="datetimeFigureOut">
+            <a:fld id="{F738D116-0CAD-48A4-9434-6F4B4BD503EE}" type="datetimeFigureOut">
               <a:rPr kumimoji="1" lang="ja-JP" altLang="en-US" smtClean="0"/>
               <a:t>2026/7/30</a:t>
             </a:fld>
@@ -500,7 +500,7 @@
           <p:cNvPr id="5" name="フッター プレースホルダー 4">
             <a:extLst>
               <a:ext uri="{FF2B5EF4-FFF2-40B4-BE49-F238E27FC236}">
-                <a16:creationId xmlns:a16="http://schemas.microsoft.com/office/drawing/2014/main" id="{1BFFCEC7-262A-A272-7164-D4FCA6845A39}"/>
+                <a16:creationId xmlns:a16="http://schemas.microsoft.com/office/drawing/2014/main" id="{B33E6A13-3E0B-24DF-E063-0DEA0B39945C}"/>
               </a:ext>
             </a:extLst>
           </p:cNvPr>
@@ -525,7 +525,7 @@
           <p:cNvPr id="6" name="スライド番号プレースホルダー 5">
             <a:extLst>
               <a:ext uri="{FF2B5EF4-FFF2-40B4-BE49-F238E27FC236}">
-                <a16:creationId xmlns:a16="http://schemas.microsoft.com/office/drawing/2014/main" id="{B56F8A13-8D75-496C-7CDE-8649315A94E4}"/>
+                <a16:creationId xmlns:a16="http://schemas.microsoft.com/office/drawing/2014/main" id="{E3930BE9-781E-B43A-830C-4F3D3D6122BF}"/>
               </a:ext>
             </a:extLst>
           </p:cNvPr>
@@ -541,7 +541,7 @@
           <a:bodyPr/>
           <a:lstStyle/>
           <a:p>
-            <a:fld id="{41ED1192-F97A-4203-869B-87C54365C7EB}" type="slidenum">
+            <a:fld id="{FCBF743A-36EF-4DED-90D4-ABFAA47045D1}" type="slidenum">
               <a:rPr kumimoji="1" lang="ja-JP" altLang="en-US" smtClean="0"/>
               <a:t>‹#›</a:t>
             </a:fld>
@@ -552,7 +552,7 @@
     </p:spTree>
     <p:extLst>
       <p:ext uri="{BB962C8B-B14F-4D97-AF65-F5344CB8AC3E}">
-        <p14:creationId xmlns:p14="http://schemas.microsoft.com/office/powerpoint/2010/main" val="3383400150"/>
+        <p14:creationId xmlns:p14="http://schemas.microsoft.com/office/powerpoint/2010/main" val="3865354986"/>
       </p:ext>
     </p:extLst>
   </p:cSld>
@@ -584,7 +584,7 @@
           <p:cNvPr id="2" name="縦書きタイトル 1">
             <a:extLst>
               <a:ext uri="{FF2B5EF4-FFF2-40B4-BE49-F238E27FC236}">
-                <a16:creationId xmlns:a16="http://schemas.microsoft.com/office/drawing/2014/main" id="{82FA556D-C8F6-18D9-025A-015FDB8F8B5E}"/>
+                <a16:creationId xmlns:a16="http://schemas.microsoft.com/office/drawing/2014/main" id="{AD0281F0-FE69-ED3B-F27F-C4E5B9156006}"/>
               </a:ext>
             </a:extLst>
           </p:cNvPr>
@@ -617,7 +617,7 @@
           <p:cNvPr id="3" name="縦書きテキスト プレースホルダー 2">
             <a:extLst>
               <a:ext uri="{FF2B5EF4-FFF2-40B4-BE49-F238E27FC236}">
-                <a16:creationId xmlns:a16="http://schemas.microsoft.com/office/drawing/2014/main" id="{9CFACE19-9983-88A2-54AB-1303846254F3}"/>
+                <a16:creationId xmlns:a16="http://schemas.microsoft.com/office/drawing/2014/main" id="{4734D229-2F0B-98B2-B791-89E0E66D8EC6}"/>
               </a:ext>
             </a:extLst>
           </p:cNvPr>
@@ -711,7 +711,7 @@
           <p:cNvPr id="4" name="日付プレースホルダー 3">
             <a:extLst>
               <a:ext uri="{FF2B5EF4-FFF2-40B4-BE49-F238E27FC236}">
-                <a16:creationId xmlns:a16="http://schemas.microsoft.com/office/drawing/2014/main" id="{67CAC605-6FF0-990C-C4C6-F03D922F831A}"/>
+                <a16:creationId xmlns:a16="http://schemas.microsoft.com/office/drawing/2014/main" id="{10496F70-5F7E-7816-D406-B932A5301BAC}"/>
               </a:ext>
             </a:extLst>
           </p:cNvPr>
@@ -727,7 +727,7 @@
           <a:bodyPr/>
           <a:lstStyle/>
           <a:p>
-            <a:fld id="{22A8C0A2-BA59-4CE8-827D-8EF6CB0A74B2}" type="datetimeFigureOut">
+            <a:fld id="{F738D116-0CAD-48A4-9434-6F4B4BD503EE}" type="datetimeFigureOut">
               <a:rPr kumimoji="1" lang="ja-JP" altLang="en-US" smtClean="0"/>
               <a:t>2026/7/30</a:t>
             </a:fld>
@@ -740,7 +740,7 @@
           <p:cNvPr id="5" name="フッター プレースホルダー 4">
             <a:extLst>
               <a:ext uri="{FF2B5EF4-FFF2-40B4-BE49-F238E27FC236}">
-                <a16:creationId xmlns:a16="http://schemas.microsoft.com/office/drawing/2014/main" id="{460A5B10-E19D-FC68-28E6-059F1E8F1445}"/>
+                <a16:creationId xmlns:a16="http://schemas.microsoft.com/office/drawing/2014/main" id="{35EF1D37-5D02-226B-AB40-2E15C6FC91F3}"/>
               </a:ext>
             </a:extLst>
           </p:cNvPr>
@@ -765,7 +765,7 @@
           <p:cNvPr id="6" name="スライド番号プレースホルダー 5">
             <a:extLst>
               <a:ext uri="{FF2B5EF4-FFF2-40B4-BE49-F238E27FC236}">
-                <a16:creationId xmlns:a16="http://schemas.microsoft.com/office/drawing/2014/main" id="{11C3F9CF-69A0-5457-3459-656F70EC7AC3}"/>
+                <a16:creationId xmlns:a16="http://schemas.microsoft.com/office/drawing/2014/main" id="{D6EBBA9B-EE8B-75FA-5A79-B7E193D65A8A}"/>
               </a:ext>
             </a:extLst>
           </p:cNvPr>
@@ -781,7 +781,7 @@
           <a:bodyPr/>
           <a:lstStyle/>
           <a:p>
-            <a:fld id="{41ED1192-F97A-4203-869B-87C54365C7EB}" type="slidenum">
+            <a:fld id="{FCBF743A-36EF-4DED-90D4-ABFAA47045D1}" type="slidenum">
               <a:rPr kumimoji="1" lang="ja-JP" altLang="en-US" smtClean="0"/>
               <a:t>‹#›</a:t>
             </a:fld>
@@ -792,7 +792,7 @@
     </p:spTree>
     <p:extLst>
       <p:ext uri="{BB962C8B-B14F-4D97-AF65-F5344CB8AC3E}">
-        <p14:creationId xmlns:p14="http://schemas.microsoft.com/office/powerpoint/2010/main" val="292019430"/>
+        <p14:creationId xmlns:p14="http://schemas.microsoft.com/office/powerpoint/2010/main" val="3419925414"/>
       </p:ext>
     </p:extLst>
   </p:cSld>
@@ -824,7 +824,7 @@
           <p:cNvPr id="2" name="タイトル 1">
             <a:extLst>
               <a:ext uri="{FF2B5EF4-FFF2-40B4-BE49-F238E27FC236}">
-                <a16:creationId xmlns:a16="http://schemas.microsoft.com/office/drawing/2014/main" id="{96A05E73-F434-7EFC-D09B-7297007CEF98}"/>
+                <a16:creationId xmlns:a16="http://schemas.microsoft.com/office/drawing/2014/main" id="{F7A322DD-4EE8-58DA-6BC9-DDBB5B8B0B13}"/>
               </a:ext>
             </a:extLst>
           </p:cNvPr>
@@ -852,7 +852,7 @@
           <p:cNvPr id="3" name="コンテンツ プレースホルダー 2">
             <a:extLst>
               <a:ext uri="{FF2B5EF4-FFF2-40B4-BE49-F238E27FC236}">
-                <a16:creationId xmlns:a16="http://schemas.microsoft.com/office/drawing/2014/main" id="{92A82A81-B586-20BC-BDC7-F7FCF6CF6D07}"/>
+                <a16:creationId xmlns:a16="http://schemas.microsoft.com/office/drawing/2014/main" id="{996CACA3-FEF4-3F2C-B349-3622C26A998D}"/>
               </a:ext>
             </a:extLst>
           </p:cNvPr>
@@ -941,7 +941,7 @@
           <p:cNvPr id="4" name="日付プレースホルダー 3">
             <a:extLst>
               <a:ext uri="{FF2B5EF4-FFF2-40B4-BE49-F238E27FC236}">
-                <a16:creationId xmlns:a16="http://schemas.microsoft.com/office/drawing/2014/main" id="{9B33A0E1-581C-87A1-CB4F-B8A5A281656A}"/>
+                <a16:creationId xmlns:a16="http://schemas.microsoft.com/office/drawing/2014/main" id="{C2C41DF6-710B-FF64-0DA8-650904E3A48A}"/>
               </a:ext>
             </a:extLst>
           </p:cNvPr>
@@ -957,7 +957,7 @@
           <a:bodyPr/>
           <a:lstStyle/>
           <a:p>
-            <a:fld id="{22A8C0A2-BA59-4CE8-827D-8EF6CB0A74B2}" type="datetimeFigureOut">
+            <a:fld id="{F738D116-0CAD-48A4-9434-6F4B4BD503EE}" type="datetimeFigureOut">
               <a:rPr kumimoji="1" lang="ja-JP" altLang="en-US" smtClean="0"/>
               <a:t>2026/7/30</a:t>
             </a:fld>
@@ -970,7 +970,7 @@
           <p:cNvPr id="5" name="フッター プレースホルダー 4">
             <a:extLst>
               <a:ext uri="{FF2B5EF4-FFF2-40B4-BE49-F238E27FC236}">
-                <a16:creationId xmlns:a16="http://schemas.microsoft.com/office/drawing/2014/main" id="{47EE1C8F-AE12-287A-8B51-3F6EAF634307}"/>
+                <a16:creationId xmlns:a16="http://schemas.microsoft.com/office/drawing/2014/main" id="{301D60B5-8B8E-F238-B174-70C28BFA4C5C}"/>
               </a:ext>
             </a:extLst>
           </p:cNvPr>
@@ -995,7 +995,7 @@
           <p:cNvPr id="6" name="スライド番号プレースホルダー 5">
             <a:extLst>
               <a:ext uri="{FF2B5EF4-FFF2-40B4-BE49-F238E27FC236}">
-                <a16:creationId xmlns:a16="http://schemas.microsoft.com/office/drawing/2014/main" id="{7EC0B255-0E8A-52F3-1C1F-4658097BCD4D}"/>
+                <a16:creationId xmlns:a16="http://schemas.microsoft.com/office/drawing/2014/main" id="{5AD6882D-451B-8FD0-7BA0-BC39DC410BE8}"/>
               </a:ext>
             </a:extLst>
           </p:cNvPr>
@@ -1011,7 +1011,7 @@
           <a:bodyPr/>
           <a:lstStyle/>
           <a:p>
-            <a:fld id="{41ED1192-F97A-4203-869B-87C54365C7EB}" type="slidenum">
+            <a:fld id="{FCBF743A-36EF-4DED-90D4-ABFAA47045D1}" type="slidenum">
               <a:rPr kumimoji="1" lang="ja-JP" altLang="en-US" smtClean="0"/>
               <a:t>‹#›</a:t>
             </a:fld>
@@ -1022,7 +1022,7 @@
     </p:spTree>
     <p:extLst>
       <p:ext uri="{BB962C8B-B14F-4D97-AF65-F5344CB8AC3E}">
-        <p14:creationId xmlns:p14="http://schemas.microsoft.com/office/powerpoint/2010/main" val="4151873276"/>
+        <p14:creationId xmlns:p14="http://schemas.microsoft.com/office/powerpoint/2010/main" val="3561189439"/>
       </p:ext>
     </p:extLst>
   </p:cSld>
@@ -1054,7 +1054,7 @@
           <p:cNvPr id="2" name="タイトル 1">
             <a:extLst>
               <a:ext uri="{FF2B5EF4-FFF2-40B4-BE49-F238E27FC236}">
-                <a16:creationId xmlns:a16="http://schemas.microsoft.com/office/drawing/2014/main" id="{EEDA9A00-82C1-6401-86B1-3C0FCF9B108A}"/>
+                <a16:creationId xmlns:a16="http://schemas.microsoft.com/office/drawing/2014/main" id="{104DE5FE-B56A-9E82-3E73-710A0E533CCB}"/>
               </a:ext>
             </a:extLst>
           </p:cNvPr>
@@ -1091,7 +1091,7 @@
           <p:cNvPr id="3" name="テキスト プレースホルダー 2">
             <a:extLst>
               <a:ext uri="{FF2B5EF4-FFF2-40B4-BE49-F238E27FC236}">
-                <a16:creationId xmlns:a16="http://schemas.microsoft.com/office/drawing/2014/main" id="{5BB9D3B3-3180-2619-77F0-9559B42C89D8}"/>
+                <a16:creationId xmlns:a16="http://schemas.microsoft.com/office/drawing/2014/main" id="{B8B4BD36-D1DE-7782-8926-B6BC0BBDAF76}"/>
               </a:ext>
             </a:extLst>
           </p:cNvPr>
@@ -1216,7 +1216,7 @@
           <p:cNvPr id="4" name="日付プレースホルダー 3">
             <a:extLst>
               <a:ext uri="{FF2B5EF4-FFF2-40B4-BE49-F238E27FC236}">
-                <a16:creationId xmlns:a16="http://schemas.microsoft.com/office/drawing/2014/main" id="{1F5E1000-AFAB-FFC2-6AD8-8307CCED0E5F}"/>
+                <a16:creationId xmlns:a16="http://schemas.microsoft.com/office/drawing/2014/main" id="{E439937B-8506-2372-0939-5F01621984F8}"/>
               </a:ext>
             </a:extLst>
           </p:cNvPr>
@@ -1232,7 +1232,7 @@
           <a:bodyPr/>
           <a:lstStyle/>
           <a:p>
-            <a:fld id="{22A8C0A2-BA59-4CE8-827D-8EF6CB0A74B2}" type="datetimeFigureOut">
+            <a:fld id="{F738D116-0CAD-48A4-9434-6F4B4BD503EE}" type="datetimeFigureOut">
               <a:rPr kumimoji="1" lang="ja-JP" altLang="en-US" smtClean="0"/>
               <a:t>2026/7/30</a:t>
             </a:fld>
@@ -1245,7 +1245,7 @@
           <p:cNvPr id="5" name="フッター プレースホルダー 4">
             <a:extLst>
               <a:ext uri="{FF2B5EF4-FFF2-40B4-BE49-F238E27FC236}">
-                <a16:creationId xmlns:a16="http://schemas.microsoft.com/office/drawing/2014/main" id="{BB9ADF95-AB98-3514-AB80-CAB13ED148C9}"/>
+                <a16:creationId xmlns:a16="http://schemas.microsoft.com/office/drawing/2014/main" id="{3A7EE1AA-D1FA-924B-E008-11D59E9A6111}"/>
               </a:ext>
             </a:extLst>
           </p:cNvPr>
@@ -1270,7 +1270,7 @@
           <p:cNvPr id="6" name="スライド番号プレースホルダー 5">
             <a:extLst>
               <a:ext uri="{FF2B5EF4-FFF2-40B4-BE49-F238E27FC236}">
-                <a16:creationId xmlns:a16="http://schemas.microsoft.com/office/drawing/2014/main" id="{4B482197-9BB6-A85C-DB40-5588D76F3346}"/>
+                <a16:creationId xmlns:a16="http://schemas.microsoft.com/office/drawing/2014/main" id="{2A34FEDE-A870-08C7-9CE2-B1156B74C67F}"/>
               </a:ext>
             </a:extLst>
           </p:cNvPr>
@@ -1286,7 +1286,7 @@
           <a:bodyPr/>
           <a:lstStyle/>
           <a:p>
-            <a:fld id="{41ED1192-F97A-4203-869B-87C54365C7EB}" type="slidenum">
+            <a:fld id="{FCBF743A-36EF-4DED-90D4-ABFAA47045D1}" type="slidenum">
               <a:rPr kumimoji="1" lang="ja-JP" altLang="en-US" smtClean="0"/>
               <a:t>‹#›</a:t>
             </a:fld>
@@ -1297,7 +1297,7 @@
     </p:spTree>
     <p:extLst>
       <p:ext uri="{BB962C8B-B14F-4D97-AF65-F5344CB8AC3E}">
-        <p14:creationId xmlns:p14="http://schemas.microsoft.com/office/powerpoint/2010/main" val="2540716486"/>
+        <p14:creationId xmlns:p14="http://schemas.microsoft.com/office/powerpoint/2010/main" val="4044901738"/>
       </p:ext>
     </p:extLst>
   </p:cSld>
@@ -1329,7 +1329,7 @@
           <p:cNvPr id="2" name="タイトル 1">
             <a:extLst>
               <a:ext uri="{FF2B5EF4-FFF2-40B4-BE49-F238E27FC236}">
-                <a16:creationId xmlns:a16="http://schemas.microsoft.com/office/drawing/2014/main" id="{DDF2F4EF-0587-EB2F-CB7C-1ECF6C282676}"/>
+                <a16:creationId xmlns:a16="http://schemas.microsoft.com/office/drawing/2014/main" id="{9A731CC6-1DA0-3DF7-AECA-AF91BB8F3E9C}"/>
               </a:ext>
             </a:extLst>
           </p:cNvPr>
@@ -1357,7 +1357,7 @@
           <p:cNvPr id="3" name="コンテンツ プレースホルダー 2">
             <a:extLst>
               <a:ext uri="{FF2B5EF4-FFF2-40B4-BE49-F238E27FC236}">
-                <a16:creationId xmlns:a16="http://schemas.microsoft.com/office/drawing/2014/main" id="{9D22D957-B87D-484B-9E88-F005704F4459}"/>
+                <a16:creationId xmlns:a16="http://schemas.microsoft.com/office/drawing/2014/main" id="{C27F7800-7E63-4388-BFBD-706346919F1B}"/>
               </a:ext>
             </a:extLst>
           </p:cNvPr>
@@ -1451,7 +1451,7 @@
           <p:cNvPr id="4" name="コンテンツ プレースホルダー 3">
             <a:extLst>
               <a:ext uri="{FF2B5EF4-FFF2-40B4-BE49-F238E27FC236}">
-                <a16:creationId xmlns:a16="http://schemas.microsoft.com/office/drawing/2014/main" id="{A6167B79-3487-5962-B361-3A45A2700943}"/>
+                <a16:creationId xmlns:a16="http://schemas.microsoft.com/office/drawing/2014/main" id="{8670B0A3-99CA-4C69-D394-6B478B94DE42}"/>
               </a:ext>
             </a:extLst>
           </p:cNvPr>
@@ -1545,7 +1545,7 @@
           <p:cNvPr id="5" name="日付プレースホルダー 4">
             <a:extLst>
               <a:ext uri="{FF2B5EF4-FFF2-40B4-BE49-F238E27FC236}">
-                <a16:creationId xmlns:a16="http://schemas.microsoft.com/office/drawing/2014/main" id="{5EB9210C-6326-F8B6-D7E5-804FCFD10D19}"/>
+                <a16:creationId xmlns:a16="http://schemas.microsoft.com/office/drawing/2014/main" id="{D8A240F9-2F51-D1A2-8665-5E78404A5E34}"/>
               </a:ext>
             </a:extLst>
           </p:cNvPr>
@@ -1561,7 +1561,7 @@
           <a:bodyPr/>
           <a:lstStyle/>
           <a:p>
-            <a:fld id="{22A8C0A2-BA59-4CE8-827D-8EF6CB0A74B2}" type="datetimeFigureOut">
+            <a:fld id="{F738D116-0CAD-48A4-9434-6F4B4BD503EE}" type="datetimeFigureOut">
               <a:rPr kumimoji="1" lang="ja-JP" altLang="en-US" smtClean="0"/>
               <a:t>2026/7/30</a:t>
             </a:fld>
@@ -1574,7 +1574,7 @@
           <p:cNvPr id="6" name="フッター プレースホルダー 5">
             <a:extLst>
               <a:ext uri="{FF2B5EF4-FFF2-40B4-BE49-F238E27FC236}">
-                <a16:creationId xmlns:a16="http://schemas.microsoft.com/office/drawing/2014/main" id="{F4ACCF16-2C2C-70C7-99DF-3345D70573C9}"/>
+                <a16:creationId xmlns:a16="http://schemas.microsoft.com/office/drawing/2014/main" id="{F22829F1-FEB0-E61A-A4B0-0289AB877AEF}"/>
               </a:ext>
             </a:extLst>
           </p:cNvPr>
@@ -1599,7 +1599,7 @@
           <p:cNvPr id="7" name="スライド番号プレースホルダー 6">
             <a:extLst>
               <a:ext uri="{FF2B5EF4-FFF2-40B4-BE49-F238E27FC236}">
-                <a16:creationId xmlns:a16="http://schemas.microsoft.com/office/drawing/2014/main" id="{3A9B143E-0E9C-7905-934E-181B904D6194}"/>
+                <a16:creationId xmlns:a16="http://schemas.microsoft.com/office/drawing/2014/main" id="{47D34A8D-010F-D39E-C8BA-8698B17A335A}"/>
               </a:ext>
             </a:extLst>
           </p:cNvPr>
@@ -1615,7 +1615,7 @@
           <a:bodyPr/>
           <a:lstStyle/>
           <a:p>
-            <a:fld id="{41ED1192-F97A-4203-869B-87C54365C7EB}" type="slidenum">
+            <a:fld id="{FCBF743A-36EF-4DED-90D4-ABFAA47045D1}" type="slidenum">
               <a:rPr kumimoji="1" lang="ja-JP" altLang="en-US" smtClean="0"/>
               <a:t>‹#›</a:t>
             </a:fld>
@@ -1626,7 +1626,7 @@
     </p:spTree>
     <p:extLst>
       <p:ext uri="{BB962C8B-B14F-4D97-AF65-F5344CB8AC3E}">
-        <p14:creationId xmlns:p14="http://schemas.microsoft.com/office/powerpoint/2010/main" val="326452946"/>
+        <p14:creationId xmlns:p14="http://schemas.microsoft.com/office/powerpoint/2010/main" val="362476888"/>
       </p:ext>
     </p:extLst>
   </p:cSld>
@@ -1658,7 +1658,7 @@
           <p:cNvPr id="2" name="タイトル 1">
             <a:extLst>
               <a:ext uri="{FF2B5EF4-FFF2-40B4-BE49-F238E27FC236}">
-                <a16:creationId xmlns:a16="http://schemas.microsoft.com/office/drawing/2014/main" id="{AEDB700C-F713-6B0D-B023-AB0DAA113CA6}"/>
+                <a16:creationId xmlns:a16="http://schemas.microsoft.com/office/drawing/2014/main" id="{0B3B63BE-C6F0-760F-BF2A-4B0F36579E87}"/>
               </a:ext>
             </a:extLst>
           </p:cNvPr>
@@ -1691,7 +1691,7 @@
           <p:cNvPr id="3" name="テキスト プレースホルダー 2">
             <a:extLst>
               <a:ext uri="{FF2B5EF4-FFF2-40B4-BE49-F238E27FC236}">
-                <a16:creationId xmlns:a16="http://schemas.microsoft.com/office/drawing/2014/main" id="{17658ADE-450C-56FE-6EA2-FAD5111F86D9}"/>
+                <a16:creationId xmlns:a16="http://schemas.microsoft.com/office/drawing/2014/main" id="{E61EDC85-46C4-5E56-B441-A27832F310F6}"/>
               </a:ext>
             </a:extLst>
           </p:cNvPr>
@@ -1762,7 +1762,7 @@
           <p:cNvPr id="4" name="コンテンツ プレースホルダー 3">
             <a:extLst>
               <a:ext uri="{FF2B5EF4-FFF2-40B4-BE49-F238E27FC236}">
-                <a16:creationId xmlns:a16="http://schemas.microsoft.com/office/drawing/2014/main" id="{8B3B2E3F-7868-4B8F-5D1A-93E63CB26191}"/>
+                <a16:creationId xmlns:a16="http://schemas.microsoft.com/office/drawing/2014/main" id="{B1AC2ACE-67BC-19B4-AC03-84CB421CA40E}"/>
               </a:ext>
             </a:extLst>
           </p:cNvPr>
@@ -1856,7 +1856,7 @@
           <p:cNvPr id="5" name="テキスト プレースホルダー 4">
             <a:extLst>
               <a:ext uri="{FF2B5EF4-FFF2-40B4-BE49-F238E27FC236}">
-                <a16:creationId xmlns:a16="http://schemas.microsoft.com/office/drawing/2014/main" id="{9721A297-B66B-E00C-F03A-DD2211833D90}"/>
+                <a16:creationId xmlns:a16="http://schemas.microsoft.com/office/drawing/2014/main" id="{EC78A14C-635C-B64D-B14D-AC544F390ACB}"/>
               </a:ext>
             </a:extLst>
           </p:cNvPr>
@@ -1927,7 +1927,7 @@
           <p:cNvPr id="6" name="コンテンツ プレースホルダー 5">
             <a:extLst>
               <a:ext uri="{FF2B5EF4-FFF2-40B4-BE49-F238E27FC236}">
-                <a16:creationId xmlns:a16="http://schemas.microsoft.com/office/drawing/2014/main" id="{A5939D63-BBB9-DF77-AA89-32FADD8B8372}"/>
+                <a16:creationId xmlns:a16="http://schemas.microsoft.com/office/drawing/2014/main" id="{D0610CB2-BE9C-D115-889F-6908ABD37ACC}"/>
               </a:ext>
             </a:extLst>
           </p:cNvPr>
@@ -2021,7 +2021,7 @@
           <p:cNvPr id="7" name="日付プレースホルダー 6">
             <a:extLst>
               <a:ext uri="{FF2B5EF4-FFF2-40B4-BE49-F238E27FC236}">
-                <a16:creationId xmlns:a16="http://schemas.microsoft.com/office/drawing/2014/main" id="{58B5AFCC-7F03-C948-F7AB-F2A2C6072CB0}"/>
+                <a16:creationId xmlns:a16="http://schemas.microsoft.com/office/drawing/2014/main" id="{FBB700E5-A993-2CF0-A4AA-E15BE316B54B}"/>
               </a:ext>
             </a:extLst>
           </p:cNvPr>
@@ -2037,7 +2037,7 @@
           <a:bodyPr/>
           <a:lstStyle/>
           <a:p>
-            <a:fld id="{22A8C0A2-BA59-4CE8-827D-8EF6CB0A74B2}" type="datetimeFigureOut">
+            <a:fld id="{F738D116-0CAD-48A4-9434-6F4B4BD503EE}" type="datetimeFigureOut">
               <a:rPr kumimoji="1" lang="ja-JP" altLang="en-US" smtClean="0"/>
               <a:t>2026/7/30</a:t>
             </a:fld>
@@ -2050,7 +2050,7 @@
           <p:cNvPr id="8" name="フッター プレースホルダー 7">
             <a:extLst>
               <a:ext uri="{FF2B5EF4-FFF2-40B4-BE49-F238E27FC236}">
-                <a16:creationId xmlns:a16="http://schemas.microsoft.com/office/drawing/2014/main" id="{3774888D-C4AD-002B-2CCE-E293E1E55617}"/>
+                <a16:creationId xmlns:a16="http://schemas.microsoft.com/office/drawing/2014/main" id="{3076D9C6-2DEE-BA09-B982-1AE16F971E03}"/>
               </a:ext>
             </a:extLst>
           </p:cNvPr>
@@ -2075,7 +2075,7 @@
           <p:cNvPr id="9" name="スライド番号プレースホルダー 8">
             <a:extLst>
               <a:ext uri="{FF2B5EF4-FFF2-40B4-BE49-F238E27FC236}">
-                <a16:creationId xmlns:a16="http://schemas.microsoft.com/office/drawing/2014/main" id="{4AD12CD5-6DBB-8F70-9F39-5C160B795C22}"/>
+                <a16:creationId xmlns:a16="http://schemas.microsoft.com/office/drawing/2014/main" id="{9F0FCE39-DF87-C6BC-2231-2E66C37FDBE0}"/>
               </a:ext>
             </a:extLst>
           </p:cNvPr>
@@ -2091,7 +2091,7 @@
           <a:bodyPr/>
           <a:lstStyle/>
           <a:p>
-            <a:fld id="{41ED1192-F97A-4203-869B-87C54365C7EB}" type="slidenum">
+            <a:fld id="{FCBF743A-36EF-4DED-90D4-ABFAA47045D1}" type="slidenum">
               <a:rPr kumimoji="1" lang="ja-JP" altLang="en-US" smtClean="0"/>
               <a:t>‹#›</a:t>
             </a:fld>
@@ -2102,7 +2102,7 @@
     </p:spTree>
     <p:extLst>
       <p:ext uri="{BB962C8B-B14F-4D97-AF65-F5344CB8AC3E}">
-        <p14:creationId xmlns:p14="http://schemas.microsoft.com/office/powerpoint/2010/main" val="3194933875"/>
+        <p14:creationId xmlns:p14="http://schemas.microsoft.com/office/powerpoint/2010/main" val="3110055995"/>
       </p:ext>
     </p:extLst>
   </p:cSld>
@@ -2134,7 +2134,7 @@
           <p:cNvPr id="2" name="タイトル 1">
             <a:extLst>
               <a:ext uri="{FF2B5EF4-FFF2-40B4-BE49-F238E27FC236}">
-                <a16:creationId xmlns:a16="http://schemas.microsoft.com/office/drawing/2014/main" id="{7ADEA043-6E44-CBF5-A628-4EA302E90955}"/>
+                <a16:creationId xmlns:a16="http://schemas.microsoft.com/office/drawing/2014/main" id="{F0ACDE5F-6656-0813-8F30-A73E2CB0CCA2}"/>
               </a:ext>
             </a:extLst>
           </p:cNvPr>
@@ -2162,7 +2162,7 @@
           <p:cNvPr id="3" name="日付プレースホルダー 2">
             <a:extLst>
               <a:ext uri="{FF2B5EF4-FFF2-40B4-BE49-F238E27FC236}">
-                <a16:creationId xmlns:a16="http://schemas.microsoft.com/office/drawing/2014/main" id="{714FBF01-5F39-6911-A109-6D76D0B76490}"/>
+                <a16:creationId xmlns:a16="http://schemas.microsoft.com/office/drawing/2014/main" id="{36E69406-E77F-0C01-BA78-A4DFADAFA2B8}"/>
               </a:ext>
             </a:extLst>
           </p:cNvPr>
@@ -2178,7 +2178,7 @@
           <a:bodyPr/>
           <a:lstStyle/>
           <a:p>
-            <a:fld id="{22A8C0A2-BA59-4CE8-827D-8EF6CB0A74B2}" type="datetimeFigureOut">
+            <a:fld id="{F738D116-0CAD-48A4-9434-6F4B4BD503EE}" type="datetimeFigureOut">
               <a:rPr kumimoji="1" lang="ja-JP" altLang="en-US" smtClean="0"/>
               <a:t>2026/7/30</a:t>
             </a:fld>
@@ -2191,7 +2191,7 @@
           <p:cNvPr id="4" name="フッター プレースホルダー 3">
             <a:extLst>
               <a:ext uri="{FF2B5EF4-FFF2-40B4-BE49-F238E27FC236}">
-                <a16:creationId xmlns:a16="http://schemas.microsoft.com/office/drawing/2014/main" id="{6C42C3AB-B256-07FA-B22A-248FA4F14C21}"/>
+                <a16:creationId xmlns:a16="http://schemas.microsoft.com/office/drawing/2014/main" id="{EA3A71A7-78DE-5C36-02DD-71967EA8D3E0}"/>
               </a:ext>
             </a:extLst>
           </p:cNvPr>
@@ -2216,7 +2216,7 @@
           <p:cNvPr id="5" name="スライド番号プレースホルダー 4">
             <a:extLst>
               <a:ext uri="{FF2B5EF4-FFF2-40B4-BE49-F238E27FC236}">
-                <a16:creationId xmlns:a16="http://schemas.microsoft.com/office/drawing/2014/main" id="{45C6B29B-A6A4-CC36-321A-B26FC6976323}"/>
+                <a16:creationId xmlns:a16="http://schemas.microsoft.com/office/drawing/2014/main" id="{6C0DF07C-F3B4-E38B-D775-F22C6153E9B6}"/>
               </a:ext>
             </a:extLst>
           </p:cNvPr>
@@ -2232,7 +2232,7 @@
           <a:bodyPr/>
           <a:lstStyle/>
           <a:p>
-            <a:fld id="{41ED1192-F97A-4203-869B-87C54365C7EB}" type="slidenum">
+            <a:fld id="{FCBF743A-36EF-4DED-90D4-ABFAA47045D1}" type="slidenum">
               <a:rPr kumimoji="1" lang="ja-JP" altLang="en-US" smtClean="0"/>
               <a:t>‹#›</a:t>
             </a:fld>
@@ -2243,7 +2243,7 @@
     </p:spTree>
     <p:extLst>
       <p:ext uri="{BB962C8B-B14F-4D97-AF65-F5344CB8AC3E}">
-        <p14:creationId xmlns:p14="http://schemas.microsoft.com/office/powerpoint/2010/main" val="3630237942"/>
+        <p14:creationId xmlns:p14="http://schemas.microsoft.com/office/powerpoint/2010/main" val="1949966006"/>
       </p:ext>
     </p:extLst>
   </p:cSld>
@@ -2275,7 +2275,7 @@
           <p:cNvPr id="2" name="日付プレースホルダー 1">
             <a:extLst>
               <a:ext uri="{FF2B5EF4-FFF2-40B4-BE49-F238E27FC236}">
-                <a16:creationId xmlns:a16="http://schemas.microsoft.com/office/drawing/2014/main" id="{68AC4C42-57DF-4BAE-0DF1-F2C2C458FA76}"/>
+                <a16:creationId xmlns:a16="http://schemas.microsoft.com/office/drawing/2014/main" id="{FFE36D48-129D-FDD9-AFE2-7B8DF6C5B79D}"/>
               </a:ext>
             </a:extLst>
           </p:cNvPr>
@@ -2291,7 +2291,7 @@
           <a:bodyPr/>
           <a:lstStyle/>
           <a:p>
-            <a:fld id="{22A8C0A2-BA59-4CE8-827D-8EF6CB0A74B2}" type="datetimeFigureOut">
+            <a:fld id="{F738D116-0CAD-48A4-9434-6F4B4BD503EE}" type="datetimeFigureOut">
               <a:rPr kumimoji="1" lang="ja-JP" altLang="en-US" smtClean="0"/>
               <a:t>2026/7/30</a:t>
             </a:fld>
@@ -2304,7 +2304,7 @@
           <p:cNvPr id="3" name="フッター プレースホルダー 2">
             <a:extLst>
               <a:ext uri="{FF2B5EF4-FFF2-40B4-BE49-F238E27FC236}">
-                <a16:creationId xmlns:a16="http://schemas.microsoft.com/office/drawing/2014/main" id="{D8FE030A-D24B-A985-6D8C-2EF8C9B70263}"/>
+                <a16:creationId xmlns:a16="http://schemas.microsoft.com/office/drawing/2014/main" id="{A4A5AD39-4734-5B89-A3BE-C1EDA9B3F934}"/>
               </a:ext>
             </a:extLst>
           </p:cNvPr>
@@ -2329,7 +2329,7 @@
           <p:cNvPr id="4" name="スライド番号プレースホルダー 3">
             <a:extLst>
               <a:ext uri="{FF2B5EF4-FFF2-40B4-BE49-F238E27FC236}">
-                <a16:creationId xmlns:a16="http://schemas.microsoft.com/office/drawing/2014/main" id="{DC10DA9F-5F6C-795A-D3CF-0FC58ACE95B2}"/>
+                <a16:creationId xmlns:a16="http://schemas.microsoft.com/office/drawing/2014/main" id="{C2F9BEC1-9F0E-73EE-D7FA-1665E979E5E6}"/>
               </a:ext>
             </a:extLst>
           </p:cNvPr>
@@ -2345,7 +2345,7 @@
           <a:bodyPr/>
           <a:lstStyle/>
           <a:p>
-            <a:fld id="{41ED1192-F97A-4203-869B-87C54365C7EB}" type="slidenum">
+            <a:fld id="{FCBF743A-36EF-4DED-90D4-ABFAA47045D1}" type="slidenum">
               <a:rPr kumimoji="1" lang="ja-JP" altLang="en-US" smtClean="0"/>
               <a:t>‹#›</a:t>
             </a:fld>
@@ -2356,7 +2356,7 @@
     </p:spTree>
     <p:extLst>
       <p:ext uri="{BB962C8B-B14F-4D97-AF65-F5344CB8AC3E}">
-        <p14:creationId xmlns:p14="http://schemas.microsoft.com/office/powerpoint/2010/main" val="1369577867"/>
+        <p14:creationId xmlns:p14="http://schemas.microsoft.com/office/powerpoint/2010/main" val="872293121"/>
       </p:ext>
     </p:extLst>
   </p:cSld>
@@ -2388,7 +2388,7 @@
           <p:cNvPr id="2" name="タイトル 1">
             <a:extLst>
               <a:ext uri="{FF2B5EF4-FFF2-40B4-BE49-F238E27FC236}">
-                <a16:creationId xmlns:a16="http://schemas.microsoft.com/office/drawing/2014/main" id="{4B702F2D-CE86-EB0D-35DE-8D7D4D469547}"/>
+                <a16:creationId xmlns:a16="http://schemas.microsoft.com/office/drawing/2014/main" id="{140E8E72-C896-A059-8447-CDFCD5C03986}"/>
               </a:ext>
             </a:extLst>
           </p:cNvPr>
@@ -2425,7 +2425,7 @@
           <p:cNvPr id="3" name="コンテンツ プレースホルダー 2">
             <a:extLst>
               <a:ext uri="{FF2B5EF4-FFF2-40B4-BE49-F238E27FC236}">
-                <a16:creationId xmlns:a16="http://schemas.microsoft.com/office/drawing/2014/main" id="{ECB2F989-61D8-532D-0B03-9379537FD55B}"/>
+                <a16:creationId xmlns:a16="http://schemas.microsoft.com/office/drawing/2014/main" id="{4181900B-174F-6270-E179-44CDCAC40022}"/>
               </a:ext>
             </a:extLst>
           </p:cNvPr>
@@ -2547,7 +2547,7 @@
           <p:cNvPr id="4" name="テキスト プレースホルダー 3">
             <a:extLst>
               <a:ext uri="{FF2B5EF4-FFF2-40B4-BE49-F238E27FC236}">
-                <a16:creationId xmlns:a16="http://schemas.microsoft.com/office/drawing/2014/main" id="{638936E9-ADB3-256A-F5F3-149F86111B7A}"/>
+                <a16:creationId xmlns:a16="http://schemas.microsoft.com/office/drawing/2014/main" id="{C19FBAB1-0966-F92B-DF9B-7BC95B11978A}"/>
               </a:ext>
             </a:extLst>
           </p:cNvPr>
@@ -2618,7 +2618,7 @@
           <p:cNvPr id="5" name="日付プレースホルダー 4">
             <a:extLst>
               <a:ext uri="{FF2B5EF4-FFF2-40B4-BE49-F238E27FC236}">
-                <a16:creationId xmlns:a16="http://schemas.microsoft.com/office/drawing/2014/main" id="{93006881-2F7D-5B14-AFD5-2B7818E208C8}"/>
+                <a16:creationId xmlns:a16="http://schemas.microsoft.com/office/drawing/2014/main" id="{00B22388-15A5-73EE-6E48-1C21FFF4AC31}"/>
               </a:ext>
             </a:extLst>
           </p:cNvPr>
@@ -2634,7 +2634,7 @@
           <a:bodyPr/>
           <a:lstStyle/>
           <a:p>
-            <a:fld id="{22A8C0A2-BA59-4CE8-827D-8EF6CB0A74B2}" type="datetimeFigureOut">
+            <a:fld id="{F738D116-0CAD-48A4-9434-6F4B4BD503EE}" type="datetimeFigureOut">
               <a:rPr kumimoji="1" lang="ja-JP" altLang="en-US" smtClean="0"/>
               <a:t>2026/7/30</a:t>
             </a:fld>
@@ -2647,7 +2647,7 @@
           <p:cNvPr id="6" name="フッター プレースホルダー 5">
             <a:extLst>
               <a:ext uri="{FF2B5EF4-FFF2-40B4-BE49-F238E27FC236}">
-                <a16:creationId xmlns:a16="http://schemas.microsoft.com/office/drawing/2014/main" id="{8355E132-699E-A148-7FDC-3187BDB92034}"/>
+                <a16:creationId xmlns:a16="http://schemas.microsoft.com/office/drawing/2014/main" id="{F7CC7DA6-0A3E-A12A-0FFC-3EB03EC175A9}"/>
               </a:ext>
             </a:extLst>
           </p:cNvPr>
@@ -2672,7 +2672,7 @@
           <p:cNvPr id="7" name="スライド番号プレースホルダー 6">
             <a:extLst>
               <a:ext uri="{FF2B5EF4-FFF2-40B4-BE49-F238E27FC236}">
-                <a16:creationId xmlns:a16="http://schemas.microsoft.com/office/drawing/2014/main" id="{A0A52C92-8011-0579-4224-A5216FF64299}"/>
+                <a16:creationId xmlns:a16="http://schemas.microsoft.com/office/drawing/2014/main" id="{68A33B1F-FDEB-9AF4-651E-8D6157F6E5A4}"/>
               </a:ext>
             </a:extLst>
           </p:cNvPr>
@@ -2688,7 +2688,7 @@
           <a:bodyPr/>
           <a:lstStyle/>
           <a:p>
-            <a:fld id="{41ED1192-F97A-4203-869B-87C54365C7EB}" type="slidenum">
+            <a:fld id="{FCBF743A-36EF-4DED-90D4-ABFAA47045D1}" type="slidenum">
               <a:rPr kumimoji="1" lang="ja-JP" altLang="en-US" smtClean="0"/>
               <a:t>‹#›</a:t>
             </a:fld>
@@ -2699,7 +2699,7 @@
     </p:spTree>
     <p:extLst>
       <p:ext uri="{BB962C8B-B14F-4D97-AF65-F5344CB8AC3E}">
-        <p14:creationId xmlns:p14="http://schemas.microsoft.com/office/powerpoint/2010/main" val="3257505796"/>
+        <p14:creationId xmlns:p14="http://schemas.microsoft.com/office/powerpoint/2010/main" val="1509440030"/>
       </p:ext>
     </p:extLst>
   </p:cSld>
@@ -2731,7 +2731,7 @@
           <p:cNvPr id="2" name="タイトル 1">
             <a:extLst>
               <a:ext uri="{FF2B5EF4-FFF2-40B4-BE49-F238E27FC236}">
-                <a16:creationId xmlns:a16="http://schemas.microsoft.com/office/drawing/2014/main" id="{E6DF2ACD-CE3D-6A8D-4244-39780564CCE6}"/>
+                <a16:creationId xmlns:a16="http://schemas.microsoft.com/office/drawing/2014/main" id="{3CE3AABF-D2CD-BF7B-5B55-15815A85FA26}"/>
               </a:ext>
             </a:extLst>
           </p:cNvPr>
@@ -2768,7 +2768,7 @@
           <p:cNvPr id="3" name="図プレースホルダー 2">
             <a:extLst>
               <a:ext uri="{FF2B5EF4-FFF2-40B4-BE49-F238E27FC236}">
-                <a16:creationId xmlns:a16="http://schemas.microsoft.com/office/drawing/2014/main" id="{B91BC629-0804-0A55-BE36-9EA0DF94C183}"/>
+                <a16:creationId xmlns:a16="http://schemas.microsoft.com/office/drawing/2014/main" id="{72AB9B34-77E7-C11E-DD6C-781A8435A4CF}"/>
               </a:ext>
             </a:extLst>
           </p:cNvPr>
@@ -2835,7 +2835,7 @@
           <p:cNvPr id="4" name="テキスト プレースホルダー 3">
             <a:extLst>
               <a:ext uri="{FF2B5EF4-FFF2-40B4-BE49-F238E27FC236}">
-                <a16:creationId xmlns:a16="http://schemas.microsoft.com/office/drawing/2014/main" id="{C448EB52-3F07-F57A-30FC-B3FD080932F9}"/>
+                <a16:creationId xmlns:a16="http://schemas.microsoft.com/office/drawing/2014/main" id="{2C517D7E-8DE1-81AA-976F-A3FB558B57AD}"/>
               </a:ext>
             </a:extLst>
           </p:cNvPr>
@@ -2906,7 +2906,7 @@
           <p:cNvPr id="5" name="日付プレースホルダー 4">
             <a:extLst>
               <a:ext uri="{FF2B5EF4-FFF2-40B4-BE49-F238E27FC236}">
-                <a16:creationId xmlns:a16="http://schemas.microsoft.com/office/drawing/2014/main" id="{B12CCD82-1A53-61E7-36CF-61A44569ED47}"/>
+                <a16:creationId xmlns:a16="http://schemas.microsoft.com/office/drawing/2014/main" id="{BF211BF5-60B8-A65A-B9BB-38B7ADBAC008}"/>
               </a:ext>
             </a:extLst>
           </p:cNvPr>
@@ -2922,7 +2922,7 @@
           <a:bodyPr/>
           <a:lstStyle/>
           <a:p>
-            <a:fld id="{22A8C0A2-BA59-4CE8-827D-8EF6CB0A74B2}" type="datetimeFigureOut">
+            <a:fld id="{F738D116-0CAD-48A4-9434-6F4B4BD503EE}" type="datetimeFigureOut">
               <a:rPr kumimoji="1" lang="ja-JP" altLang="en-US" smtClean="0"/>
               <a:t>2026/7/30</a:t>
             </a:fld>
@@ -2935,7 +2935,7 @@
           <p:cNvPr id="6" name="フッター プレースホルダー 5">
             <a:extLst>
               <a:ext uri="{FF2B5EF4-FFF2-40B4-BE49-F238E27FC236}">
-                <a16:creationId xmlns:a16="http://schemas.microsoft.com/office/drawing/2014/main" id="{34257B7A-DE50-2813-06B9-9EFDFBE1F466}"/>
+                <a16:creationId xmlns:a16="http://schemas.microsoft.com/office/drawing/2014/main" id="{4F74C4CD-0830-5367-C9B9-D41A67250CCD}"/>
               </a:ext>
             </a:extLst>
           </p:cNvPr>
@@ -2960,7 +2960,7 @@
           <p:cNvPr id="7" name="スライド番号プレースホルダー 6">
             <a:extLst>
               <a:ext uri="{FF2B5EF4-FFF2-40B4-BE49-F238E27FC236}">
-                <a16:creationId xmlns:a16="http://schemas.microsoft.com/office/drawing/2014/main" id="{DB25C5D4-5B62-60BE-1237-5DC151FE079D}"/>
+                <a16:creationId xmlns:a16="http://schemas.microsoft.com/office/drawing/2014/main" id="{2F2FD2FD-11A1-0A5E-41B0-A5DAE67504D4}"/>
               </a:ext>
             </a:extLst>
           </p:cNvPr>
@@ -2976,7 +2976,7 @@
           <a:bodyPr/>
           <a:lstStyle/>
           <a:p>
-            <a:fld id="{41ED1192-F97A-4203-869B-87C54365C7EB}" type="slidenum">
+            <a:fld id="{FCBF743A-36EF-4DED-90D4-ABFAA47045D1}" type="slidenum">
               <a:rPr kumimoji="1" lang="ja-JP" altLang="en-US" smtClean="0"/>
               <a:t>‹#›</a:t>
             </a:fld>
@@ -2987,7 +2987,7 @@
     </p:spTree>
     <p:extLst>
       <p:ext uri="{BB962C8B-B14F-4D97-AF65-F5344CB8AC3E}">
-        <p14:creationId xmlns:p14="http://schemas.microsoft.com/office/powerpoint/2010/main" val="330822912"/>
+        <p14:creationId xmlns:p14="http://schemas.microsoft.com/office/powerpoint/2010/main" val="85135139"/>
       </p:ext>
     </p:extLst>
   </p:cSld>
@@ -3024,7 +3024,7 @@
           <p:cNvPr id="2" name="タイトル プレースホルダー 1">
             <a:extLst>
               <a:ext uri="{FF2B5EF4-FFF2-40B4-BE49-F238E27FC236}">
-                <a16:creationId xmlns:a16="http://schemas.microsoft.com/office/drawing/2014/main" id="{E4668464-BE4E-1174-E6E7-D6F21DC80F05}"/>
+                <a16:creationId xmlns:a16="http://schemas.microsoft.com/office/drawing/2014/main" id="{2721A09A-1896-CFC3-C145-229FA1F72181}"/>
               </a:ext>
             </a:extLst>
           </p:cNvPr>
@@ -3062,7 +3062,7 @@
           <p:cNvPr id="3" name="テキスト プレースホルダー 2">
             <a:extLst>
               <a:ext uri="{FF2B5EF4-FFF2-40B4-BE49-F238E27FC236}">
-                <a16:creationId xmlns:a16="http://schemas.microsoft.com/office/drawing/2014/main" id="{7171CBE6-902F-E9D9-D524-20B5D6A6D648}"/>
+                <a16:creationId xmlns:a16="http://schemas.microsoft.com/office/drawing/2014/main" id="{BB47480C-0523-377D-6F2A-672D6894C6C6}"/>
               </a:ext>
             </a:extLst>
           </p:cNvPr>
@@ -3161,7 +3161,7 @@
           <p:cNvPr id="4" name="日付プレースホルダー 3">
             <a:extLst>
               <a:ext uri="{FF2B5EF4-FFF2-40B4-BE49-F238E27FC236}">
-                <a16:creationId xmlns:a16="http://schemas.microsoft.com/office/drawing/2014/main" id="{99D06986-1397-4DBD-36B5-EAB35BA5DE1A}"/>
+                <a16:creationId xmlns:a16="http://schemas.microsoft.com/office/drawing/2014/main" id="{8155F5D8-D648-5255-C481-D93C833AD951}"/>
               </a:ext>
             </a:extLst>
           </p:cNvPr>
@@ -3195,7 +3195,7 @@
             </a:lvl1pPr>
           </a:lstStyle>
           <a:p>
-            <a:fld id="{22A8C0A2-BA59-4CE8-827D-8EF6CB0A74B2}" type="datetimeFigureOut">
+            <a:fld id="{F738D116-0CAD-48A4-9434-6F4B4BD503EE}" type="datetimeFigureOut">
               <a:rPr kumimoji="1" lang="ja-JP" altLang="en-US" smtClean="0"/>
               <a:t>2026/7/30</a:t>
             </a:fld>
@@ -3208,7 +3208,7 @@
           <p:cNvPr id="5" name="フッター プレースホルダー 4">
             <a:extLst>
               <a:ext uri="{FF2B5EF4-FFF2-40B4-BE49-F238E27FC236}">
-                <a16:creationId xmlns:a16="http://schemas.microsoft.com/office/drawing/2014/main" id="{283D139B-A116-68A3-138B-DACB4D90DA5A}"/>
+                <a16:creationId xmlns:a16="http://schemas.microsoft.com/office/drawing/2014/main" id="{F10AFB0B-76BF-F9BB-E75E-AE516D1651DC}"/>
               </a:ext>
             </a:extLst>
           </p:cNvPr>
@@ -3251,7 +3251,7 @@
           <p:cNvPr id="6" name="スライド番号プレースホルダー 5">
             <a:extLst>
               <a:ext uri="{FF2B5EF4-FFF2-40B4-BE49-F238E27FC236}">
-                <a16:creationId xmlns:a16="http://schemas.microsoft.com/office/drawing/2014/main" id="{806302F5-8ED8-ADB3-4F4A-AED6BBA45EDD}"/>
+                <a16:creationId xmlns:a16="http://schemas.microsoft.com/office/drawing/2014/main" id="{E2FC85BB-14B8-B1A5-6F27-11DA5FF3A280}"/>
               </a:ext>
             </a:extLst>
           </p:cNvPr>
@@ -3285,7 +3285,7 @@
             </a:lvl1pPr>
           </a:lstStyle>
           <a:p>
-            <a:fld id="{41ED1192-F97A-4203-869B-87C54365C7EB}" type="slidenum">
+            <a:fld id="{FCBF743A-36EF-4DED-90D4-ABFAA47045D1}" type="slidenum">
               <a:rPr kumimoji="1" lang="ja-JP" altLang="en-US" smtClean="0"/>
               <a:t>‹#›</a:t>
             </a:fld>
@@ -3296,7 +3296,7 @@
     </p:spTree>
     <p:extLst>
       <p:ext uri="{BB962C8B-B14F-4D97-AF65-F5344CB8AC3E}">
-        <p14:creationId xmlns:p14="http://schemas.microsoft.com/office/powerpoint/2010/main" val="1862919350"/>
+        <p14:creationId xmlns:p14="http://schemas.microsoft.com/office/powerpoint/2010/main" val="2600851178"/>
       </p:ext>
     </p:extLst>
   </p:cSld>
@@ -3619,7 +3619,7 @@
           <p:cNvPr id="2" name="テキスト ボックス 1">
             <a:extLst>
               <a:ext uri="{FF2B5EF4-FFF2-40B4-BE49-F238E27FC236}">
-                <a16:creationId xmlns:a16="http://schemas.microsoft.com/office/drawing/2014/main" id="{331453F6-D72A-FCA6-BC34-288330EAC06E}"/>
+                <a16:creationId xmlns:a16="http://schemas.microsoft.com/office/drawing/2014/main" id="{24C33480-BFFB-144F-FE7C-0E1AC8B63978}"/>
               </a:ext>
             </a:extLst>
           </p:cNvPr>
@@ -3665,7 +3665,7 @@
           <p:cNvPr id="3" name="テキスト ボックス 2">
             <a:extLst>
               <a:ext uri="{FF2B5EF4-FFF2-40B4-BE49-F238E27FC236}">
-                <a16:creationId xmlns:a16="http://schemas.microsoft.com/office/drawing/2014/main" id="{ABEB08A6-6223-567C-1CE7-C961F220CED4}"/>
+                <a16:creationId xmlns:a16="http://schemas.microsoft.com/office/drawing/2014/main" id="{39BBBFDC-DF53-E0D9-1EBB-E5723F7BCAE8}"/>
               </a:ext>
             </a:extLst>
           </p:cNvPr>
@@ -3714,7 +3714,7 @@
           <p:cNvPr id="4" name="テキスト ボックス 3">
             <a:extLst>
               <a:ext uri="{FF2B5EF4-FFF2-40B4-BE49-F238E27FC236}">
-                <a16:creationId xmlns:a16="http://schemas.microsoft.com/office/drawing/2014/main" id="{5D1625CC-FF13-ECD9-C1E0-41AF22F53D01}"/>
+                <a16:creationId xmlns:a16="http://schemas.microsoft.com/office/drawing/2014/main" id="{D587E62C-70F0-09BF-A4B0-74CBA32DDFEF}"/>
               </a:ext>
             </a:extLst>
           </p:cNvPr>
@@ -3754,7 +3754,7 @@
           <p:cNvPr id="5" name="テキスト ボックス 4">
             <a:extLst>
               <a:ext uri="{FF2B5EF4-FFF2-40B4-BE49-F238E27FC236}">
-                <a16:creationId xmlns:a16="http://schemas.microsoft.com/office/drawing/2014/main" id="{4FF5459E-A2F5-AD49-1023-B722ECFA1CFE}"/>
+                <a16:creationId xmlns:a16="http://schemas.microsoft.com/office/drawing/2014/main" id="{A9620A32-085A-62EC-C59E-DFC7FEBC96DE}"/>
               </a:ext>
             </a:extLst>
           </p:cNvPr>
@@ -3801,7 +3801,7 @@
             <a:hlinkClick r:id="" action="ppaction://media"/>
             <a:extLst>
               <a:ext uri="{FF2B5EF4-FFF2-40B4-BE49-F238E27FC236}">
-                <a16:creationId xmlns:a16="http://schemas.microsoft.com/office/drawing/2014/main" id="{EC82F9C6-0955-0D69-08EC-13E60811D37B}"/>
+                <a16:creationId xmlns:a16="http://schemas.microsoft.com/office/drawing/2014/main" id="{F2DEDA35-8FE6-D3BD-8D41-6E6D58DED78E}"/>
               </a:ext>
             </a:extLst>
           </p:cNvPr>
@@ -3836,7 +3836,7 @@
     </p:spTree>
     <p:extLst>
       <p:ext uri="{BB962C8B-B14F-4D97-AF65-F5344CB8AC3E}">
-        <p14:creationId xmlns:p14="http://schemas.microsoft.com/office/powerpoint/2010/main" val="3172514727"/>
+        <p14:creationId xmlns:p14="http://schemas.microsoft.com/office/powerpoint/2010/main" val="4231616639"/>
       </p:ext>
     </p:extLst>
   </p:cSld>
@@ -3960,7 +3960,7 @@
           <p:cNvPr id="2" name="テキスト ボックス 1">
             <a:extLst>
               <a:ext uri="{FF2B5EF4-FFF2-40B4-BE49-F238E27FC236}">
-                <a16:creationId xmlns:a16="http://schemas.microsoft.com/office/drawing/2014/main" id="{B3C035F0-F009-8C7F-B675-B7B9195E9166}"/>
+                <a16:creationId xmlns:a16="http://schemas.microsoft.com/office/drawing/2014/main" id="{BEB91038-B33C-EAEF-64AE-5091937C40D0}"/>
               </a:ext>
             </a:extLst>
           </p:cNvPr>
@@ -4006,7 +4006,7 @@
           <p:cNvPr id="3" name="テキスト ボックス 2">
             <a:extLst>
               <a:ext uri="{FF2B5EF4-FFF2-40B4-BE49-F238E27FC236}">
-                <a16:creationId xmlns:a16="http://schemas.microsoft.com/office/drawing/2014/main" id="{1BFA0F9A-B695-6113-D0CB-A7869B66FFD8}"/>
+                <a16:creationId xmlns:a16="http://schemas.microsoft.com/office/drawing/2014/main" id="{8D553CDE-305B-C954-A535-3F86AFB810AD}"/>
               </a:ext>
             </a:extLst>
           </p:cNvPr>
@@ -4046,7 +4046,7 @@
           <p:cNvPr id="4" name="テキスト ボックス 3">
             <a:extLst>
               <a:ext uri="{FF2B5EF4-FFF2-40B4-BE49-F238E27FC236}">
-                <a16:creationId xmlns:a16="http://schemas.microsoft.com/office/drawing/2014/main" id="{39C39B97-4A0B-43DE-6D2B-99528EEFFDF4}"/>
+                <a16:creationId xmlns:a16="http://schemas.microsoft.com/office/drawing/2014/main" id="{BFF0D74B-E20D-3E2B-E481-1A14EB0565C4}"/>
               </a:ext>
             </a:extLst>
           </p:cNvPr>
@@ -4104,7 +4104,7 @@
           <p:cNvPr id="5" name="テキスト ボックス 4">
             <a:extLst>
               <a:ext uri="{FF2B5EF4-FFF2-40B4-BE49-F238E27FC236}">
-                <a16:creationId xmlns:a16="http://schemas.microsoft.com/office/drawing/2014/main" id="{E85FE382-F315-00C2-AE1E-B3773ECBC465}"/>
+                <a16:creationId xmlns:a16="http://schemas.microsoft.com/office/drawing/2014/main" id="{D7393E6C-AF46-CC6A-7A4D-7F1FAE671CC7}"/>
               </a:ext>
             </a:extLst>
           </p:cNvPr>
@@ -4151,7 +4151,7 @@
             <a:hlinkClick r:id="" action="ppaction://media"/>
             <a:extLst>
               <a:ext uri="{FF2B5EF4-FFF2-40B4-BE49-F238E27FC236}">
-                <a16:creationId xmlns:a16="http://schemas.microsoft.com/office/drawing/2014/main" id="{18B71C62-0A1B-9A6F-DA7A-0F5BBBDDBF17}"/>
+                <a16:creationId xmlns:a16="http://schemas.microsoft.com/office/drawing/2014/main" id="{DDA3DD06-6CAF-6177-2993-47FAB960A8D3}"/>
               </a:ext>
             </a:extLst>
           </p:cNvPr>
@@ -4186,7 +4186,7 @@
     </p:spTree>
     <p:extLst>
       <p:ext uri="{BB962C8B-B14F-4D97-AF65-F5344CB8AC3E}">
-        <p14:creationId xmlns:p14="http://schemas.microsoft.com/office/powerpoint/2010/main" val="3128020358"/>
+        <p14:creationId xmlns:p14="http://schemas.microsoft.com/office/powerpoint/2010/main" val="3079776651"/>
       </p:ext>
     </p:extLst>
   </p:cSld>
@@ -4310,7 +4310,7 @@
           <p:cNvPr id="2" name="テキスト ボックス 1">
             <a:extLst>
               <a:ext uri="{FF2B5EF4-FFF2-40B4-BE49-F238E27FC236}">
-                <a16:creationId xmlns:a16="http://schemas.microsoft.com/office/drawing/2014/main" id="{CAB6741F-1D5B-EE74-8932-D44F77DF3B29}"/>
+                <a16:creationId xmlns:a16="http://schemas.microsoft.com/office/drawing/2014/main" id="{6FE832C6-45DB-4A47-B208-05961FE222B2}"/>
               </a:ext>
             </a:extLst>
           </p:cNvPr>
@@ -4356,7 +4356,7 @@
           <p:cNvPr id="3" name="テキスト ボックス 2">
             <a:extLst>
               <a:ext uri="{FF2B5EF4-FFF2-40B4-BE49-F238E27FC236}">
-                <a16:creationId xmlns:a16="http://schemas.microsoft.com/office/drawing/2014/main" id="{FFA415D6-1726-8938-0A92-B863B96C3514}"/>
+                <a16:creationId xmlns:a16="http://schemas.microsoft.com/office/drawing/2014/main" id="{226A30B7-E21F-338C-3108-FC4549146918}"/>
               </a:ext>
             </a:extLst>
           </p:cNvPr>
@@ -4396,7 +4396,7 @@
           <p:cNvPr id="4" name="テキスト ボックス 3">
             <a:extLst>
               <a:ext uri="{FF2B5EF4-FFF2-40B4-BE49-F238E27FC236}">
-                <a16:creationId xmlns:a16="http://schemas.microsoft.com/office/drawing/2014/main" id="{05FD2849-CD5A-7DC9-6F0B-FCE1F88963B8}"/>
+                <a16:creationId xmlns:a16="http://schemas.microsoft.com/office/drawing/2014/main" id="{AED44C08-3320-D264-105D-DEE650EB6E06}"/>
               </a:ext>
             </a:extLst>
           </p:cNvPr>
@@ -4491,7 +4491,7 @@
           <p:cNvPr id="5" name="テキスト ボックス 4">
             <a:extLst>
               <a:ext uri="{FF2B5EF4-FFF2-40B4-BE49-F238E27FC236}">
-                <a16:creationId xmlns:a16="http://schemas.microsoft.com/office/drawing/2014/main" id="{AED084B6-F618-F28D-EC21-48F757531723}"/>
+                <a16:creationId xmlns:a16="http://schemas.microsoft.com/office/drawing/2014/main" id="{E3D24F51-C5B2-5005-942C-F7B51C070F14}"/>
               </a:ext>
             </a:extLst>
           </p:cNvPr>
@@ -4538,7 +4538,7 @@
             <a:hlinkClick r:id="" action="ppaction://media"/>
             <a:extLst>
               <a:ext uri="{FF2B5EF4-FFF2-40B4-BE49-F238E27FC236}">
-                <a16:creationId xmlns:a16="http://schemas.microsoft.com/office/drawing/2014/main" id="{F85E292C-836B-7134-EE1B-977BE4A206AB}"/>
+                <a16:creationId xmlns:a16="http://schemas.microsoft.com/office/drawing/2014/main" id="{65AC5AE0-6D8B-4842-362D-28F0A652C6D1}"/>
               </a:ext>
             </a:extLst>
           </p:cNvPr>
@@ -4573,7 +4573,7 @@
     </p:spTree>
     <p:extLst>
       <p:ext uri="{BB962C8B-B14F-4D97-AF65-F5344CB8AC3E}">
-        <p14:creationId xmlns:p14="http://schemas.microsoft.com/office/powerpoint/2010/main" val="2191949567"/>
+        <p14:creationId xmlns:p14="http://schemas.microsoft.com/office/powerpoint/2010/main" val="946573646"/>
       </p:ext>
     </p:extLst>
   </p:cSld>
@@ -4697,7 +4697,7 @@
           <p:cNvPr id="2" name="テキスト ボックス 1">
             <a:extLst>
               <a:ext uri="{FF2B5EF4-FFF2-40B4-BE49-F238E27FC236}">
-                <a16:creationId xmlns:a16="http://schemas.microsoft.com/office/drawing/2014/main" id="{65DE3A38-9CFA-821F-7A87-C67759C15D16}"/>
+                <a16:creationId xmlns:a16="http://schemas.microsoft.com/office/drawing/2014/main" id="{683165A0-8ED7-13ED-C73D-A25EB6340098}"/>
               </a:ext>
             </a:extLst>
           </p:cNvPr>
@@ -4743,7 +4743,7 @@
           <p:cNvPr id="3" name="テキスト ボックス 2">
             <a:extLst>
               <a:ext uri="{FF2B5EF4-FFF2-40B4-BE49-F238E27FC236}">
-                <a16:creationId xmlns:a16="http://schemas.microsoft.com/office/drawing/2014/main" id="{5B8E0BDD-B0B7-E85B-526C-AD87FE013EF3}"/>
+                <a16:creationId xmlns:a16="http://schemas.microsoft.com/office/drawing/2014/main" id="{D8F4C452-CC24-C795-04E0-F9F3ECA56CB1}"/>
               </a:ext>
             </a:extLst>
           </p:cNvPr>
@@ -4783,7 +4783,7 @@
           <p:cNvPr id="4" name="テキスト ボックス 3">
             <a:extLst>
               <a:ext uri="{FF2B5EF4-FFF2-40B4-BE49-F238E27FC236}">
-                <a16:creationId xmlns:a16="http://schemas.microsoft.com/office/drawing/2014/main" id="{0FE96185-E239-5F95-476F-076AE022D725}"/>
+                <a16:creationId xmlns:a16="http://schemas.microsoft.com/office/drawing/2014/main" id="{2FA4FD2E-0E04-E9C5-9D38-45C3DA360062}"/>
               </a:ext>
             </a:extLst>
           </p:cNvPr>
@@ -4893,7 +4893,7 @@
           <p:cNvPr id="5" name="テキスト ボックス 4">
             <a:extLst>
               <a:ext uri="{FF2B5EF4-FFF2-40B4-BE49-F238E27FC236}">
-                <a16:creationId xmlns:a16="http://schemas.microsoft.com/office/drawing/2014/main" id="{6AE7A4EB-8829-432E-BF74-8D2DA18015A6}"/>
+                <a16:creationId xmlns:a16="http://schemas.microsoft.com/office/drawing/2014/main" id="{E59D91AD-F560-E00C-6F58-39A18D355ADB}"/>
               </a:ext>
             </a:extLst>
           </p:cNvPr>
@@ -4940,7 +4940,7 @@
             <a:hlinkClick r:id="" action="ppaction://media"/>
             <a:extLst>
               <a:ext uri="{FF2B5EF4-FFF2-40B4-BE49-F238E27FC236}">
-                <a16:creationId xmlns:a16="http://schemas.microsoft.com/office/drawing/2014/main" id="{A04EA59D-A356-7150-588E-B6B5180DBAAB}"/>
+                <a16:creationId xmlns:a16="http://schemas.microsoft.com/office/drawing/2014/main" id="{BA4F8C23-44F9-A3E9-6744-760C750CA86D}"/>
               </a:ext>
             </a:extLst>
           </p:cNvPr>
@@ -4975,7 +4975,7 @@
     </p:spTree>
     <p:extLst>
       <p:ext uri="{BB962C8B-B14F-4D97-AF65-F5344CB8AC3E}">
-        <p14:creationId xmlns:p14="http://schemas.microsoft.com/office/powerpoint/2010/main" val="2956081609"/>
+        <p14:creationId xmlns:p14="http://schemas.microsoft.com/office/powerpoint/2010/main" val="1304427078"/>
       </p:ext>
     </p:extLst>
   </p:cSld>
@@ -5099,7 +5099,7 @@
           <p:cNvPr id="2" name="テキスト ボックス 1">
             <a:extLst>
               <a:ext uri="{FF2B5EF4-FFF2-40B4-BE49-F238E27FC236}">
-                <a16:creationId xmlns:a16="http://schemas.microsoft.com/office/drawing/2014/main" id="{DA91B4FA-0F22-DD91-8746-18D61B5AA542}"/>
+                <a16:creationId xmlns:a16="http://schemas.microsoft.com/office/drawing/2014/main" id="{BD4D24A6-DA69-74F5-AB44-DF5AEEA5F928}"/>
               </a:ext>
             </a:extLst>
           </p:cNvPr>
@@ -5145,7 +5145,7 @@
           <p:cNvPr id="3" name="テキスト ボックス 2">
             <a:extLst>
               <a:ext uri="{FF2B5EF4-FFF2-40B4-BE49-F238E27FC236}">
-                <a16:creationId xmlns:a16="http://schemas.microsoft.com/office/drawing/2014/main" id="{9395B8B3-65F5-AC90-2DAF-A2BEF5658463}"/>
+                <a16:creationId xmlns:a16="http://schemas.microsoft.com/office/drawing/2014/main" id="{18F4B655-438F-DDF4-6961-991D8F7138DF}"/>
               </a:ext>
             </a:extLst>
           </p:cNvPr>
@@ -5185,7 +5185,7 @@
           <p:cNvPr id="4" name="テキスト ボックス 3">
             <a:extLst>
               <a:ext uri="{FF2B5EF4-FFF2-40B4-BE49-F238E27FC236}">
-                <a16:creationId xmlns:a16="http://schemas.microsoft.com/office/drawing/2014/main" id="{C97DAE5A-6929-E958-5CB6-439A2642F0EF}"/>
+                <a16:creationId xmlns:a16="http://schemas.microsoft.com/office/drawing/2014/main" id="{9A6B65E4-C4BA-2620-303F-D22244F17CD3}"/>
               </a:ext>
             </a:extLst>
           </p:cNvPr>
@@ -5209,20 +5209,14 @@
           <a:lstStyle/>
           <a:p>
             <a:r>
-              <a:rPr kumimoji="1" lang="fr-FR" altLang="ja-JP" sz="2000">
+              <a:rPr kumimoji="1" lang="ja-JP" altLang="en-US" sz="2000">
                 <a:solidFill>
                   <a:srgbClr val="333333"/>
                 </a:solidFill>
                 <a:latin typeface="Arial" panose="020B0604020202020204" pitchFamily="34" charset="0"/>
               </a:rPr>
-              <a:t>Fix repository article automation exclusions</a:t>
-            </a:r>
-            <a:endParaRPr kumimoji="1" lang="ja-JP" altLang="en-US" sz="2000">
-              <a:solidFill>
-                <a:srgbClr val="333333"/>
-              </a:solidFill>
-              <a:latin typeface="Arial" panose="020B0604020202020204" pitchFamily="34" charset="0"/>
-            </a:endParaRPr>
+              <a:t>直近のコミットでは、不具合修正と安定性向上が行われました。</a:t>
+            </a:r>
           </a:p>
         </p:txBody>
       </p:sp>
@@ -5231,7 +5225,7 @@
           <p:cNvPr id="5" name="テキスト ボックス 4">
             <a:extLst>
               <a:ext uri="{FF2B5EF4-FFF2-40B4-BE49-F238E27FC236}">
-                <a16:creationId xmlns:a16="http://schemas.microsoft.com/office/drawing/2014/main" id="{77BAB587-1D33-2643-BD83-6A44F806B038}"/>
+                <a16:creationId xmlns:a16="http://schemas.microsoft.com/office/drawing/2014/main" id="{72BAA581-491E-9FDE-BDCE-877E3CBD74AC}"/>
               </a:ext>
             </a:extLst>
           </p:cNvPr>
@@ -5278,7 +5272,7 @@
             <a:hlinkClick r:id="" action="ppaction://media"/>
             <a:extLst>
               <a:ext uri="{FF2B5EF4-FFF2-40B4-BE49-F238E27FC236}">
-                <a16:creationId xmlns:a16="http://schemas.microsoft.com/office/drawing/2014/main" id="{33D00317-5009-6D8C-A9D4-4A05DBCD156E}"/>
+                <a16:creationId xmlns:a16="http://schemas.microsoft.com/office/drawing/2014/main" id="{7ECA4B98-8717-8351-E150-AC85E123290C}"/>
               </a:ext>
             </a:extLst>
           </p:cNvPr>
@@ -5313,7 +5307,7 @@
     </p:spTree>
     <p:extLst>
       <p:ext uri="{BB962C8B-B14F-4D97-AF65-F5344CB8AC3E}">
-        <p14:creationId xmlns:p14="http://schemas.microsoft.com/office/powerpoint/2010/main" val="898215970"/>
+        <p14:creationId xmlns:p14="http://schemas.microsoft.com/office/powerpoint/2010/main" val="2427882064"/>
       </p:ext>
     </p:extLst>
   </p:cSld>
@@ -5322,10 +5316,10 @@
   </p:clrMapOvr>
   <mc:AlternateContent xmlns:mc="http://schemas.openxmlformats.org/markup-compatibility/2006">
     <mc:Choice xmlns:p14="http://schemas.microsoft.com/office/powerpoint/2010/main" Requires="p14">
-      <p:transition spd="slow" p14:dur="2000" advTm="8000"/>
+      <p:transition spd="slow" p14:dur="2000" advTm="6000"/>
     </mc:Choice>
     <mc:Fallback>
-      <p:transition spd="slow" advTm="8000"/>
+      <p:transition spd="slow" advTm="6000"/>
     </mc:Fallback>
   </mc:AlternateContent>
   <p:timing>
@@ -5356,7 +5350,7 @@
                                   <p:childTnLst>
                                     <p:cmd type="call" cmd="playFrom(0.0)">
                                       <p:cBhvr>
-                                        <p:cTn id="6" dur="7676" fill="hold"/>
+                                        <p:cTn id="6" dur="5771" fill="hold"/>
                                         <p:tgtEl>
                                           <p:spTgt spid="6"/>
                                         </p:tgtEl>
@@ -5437,7 +5431,7 @@
           <p:cNvPr id="2" name="テキスト ボックス 1">
             <a:extLst>
               <a:ext uri="{FF2B5EF4-FFF2-40B4-BE49-F238E27FC236}">
-                <a16:creationId xmlns:a16="http://schemas.microsoft.com/office/drawing/2014/main" id="{1D5A5A25-9153-2385-CFE6-43FA3DDBBD38}"/>
+                <a16:creationId xmlns:a16="http://schemas.microsoft.com/office/drawing/2014/main" id="{AAE35C4C-0C25-9E16-0757-3682D184CC96}"/>
               </a:ext>
             </a:extLst>
           </p:cNvPr>
@@ -5483,7 +5477,7 @@
           <p:cNvPr id="3" name="テキスト ボックス 2">
             <a:extLst>
               <a:ext uri="{FF2B5EF4-FFF2-40B4-BE49-F238E27FC236}">
-                <a16:creationId xmlns:a16="http://schemas.microsoft.com/office/drawing/2014/main" id="{D01B69CD-6383-14FC-5EAD-BEA6DC2334F3}"/>
+                <a16:creationId xmlns:a16="http://schemas.microsoft.com/office/drawing/2014/main" id="{8C4BBF12-C632-5A72-4E26-387FCA354A21}"/>
               </a:ext>
             </a:extLst>
           </p:cNvPr>
@@ -5523,7 +5517,7 @@
           <p:cNvPr id="4" name="テキスト ボックス 3">
             <a:extLst>
               <a:ext uri="{FF2B5EF4-FFF2-40B4-BE49-F238E27FC236}">
-                <a16:creationId xmlns:a16="http://schemas.microsoft.com/office/drawing/2014/main" id="{88811672-9848-0104-0BF9-88F4DB460CB1}"/>
+                <a16:creationId xmlns:a16="http://schemas.microsoft.com/office/drawing/2014/main" id="{17D1C29D-E690-62EE-4C11-25F9B292E934}"/>
               </a:ext>
             </a:extLst>
           </p:cNvPr>
@@ -5588,7 +5582,7 @@
           <p:cNvPr id="5" name="テキスト ボックス 4">
             <a:extLst>
               <a:ext uri="{FF2B5EF4-FFF2-40B4-BE49-F238E27FC236}">
-                <a16:creationId xmlns:a16="http://schemas.microsoft.com/office/drawing/2014/main" id="{9CA484C2-359C-1A3B-F145-CEBE96E7EDA9}"/>
+                <a16:creationId xmlns:a16="http://schemas.microsoft.com/office/drawing/2014/main" id="{28BF6CE4-328E-7244-D54B-677301BC5E3F}"/>
               </a:ext>
             </a:extLst>
           </p:cNvPr>
@@ -5635,7 +5629,7 @@
             <a:hlinkClick r:id="" action="ppaction://media"/>
             <a:extLst>
               <a:ext uri="{FF2B5EF4-FFF2-40B4-BE49-F238E27FC236}">
-                <a16:creationId xmlns:a16="http://schemas.microsoft.com/office/drawing/2014/main" id="{111A9BB0-7243-AD61-BC37-228239C343C2}"/>
+                <a16:creationId xmlns:a16="http://schemas.microsoft.com/office/drawing/2014/main" id="{A4F68030-29F5-D8F2-A45F-73F9E8703871}"/>
               </a:ext>
             </a:extLst>
           </p:cNvPr>
@@ -5670,7 +5664,7 @@
     </p:spTree>
     <p:extLst>
       <p:ext uri="{BB962C8B-B14F-4D97-AF65-F5344CB8AC3E}">
-        <p14:creationId xmlns:p14="http://schemas.microsoft.com/office/powerpoint/2010/main" val="4203411669"/>
+        <p14:creationId xmlns:p14="http://schemas.microsoft.com/office/powerpoint/2010/main" val="2936290553"/>
       </p:ext>
     </p:extLst>
   </p:cSld>
